--- a/dailys/Entrega_Viernes/HELIOS_Sprint2.pptx
+++ b/dailys/Entrega_Viernes/HELIOS_Sprint2.pptx
@@ -13,6 +13,8 @@
     <p:sldId id="261" r:id="rId12"/>
     <p:sldId id="262" r:id="rId13"/>
     <p:sldId id="263" r:id="rId14"/>
+    <p:sldId id="264" r:id="rId15"/>
+    <p:sldId id="265" r:id="rId16"/>
   </p:sldIdLst>
   <p:sldSz cx="12191695" cy="6858000" type="screen4x3"/>
   <p:notesSz cx="6858000" cy="9144000"/>
@@ -3493,7 +3495,443 @@
                 </a:solidFill>
                 <a:latin typeface="Calibri"/>
               </a:rPr>
-              <a:t>1 / 8</a:t>
+              <a:t>1 / 10</a:t>
+            </a:r>
+          </a:p>
+        </p:txBody>
+      </p:sp>
+    </p:spTree>
+  </p:cSld>
+  <p:clrMapOvr>
+    <a:masterClrMapping/>
+  </p:clrMapOvr>
+</p:sld>
+</file>
+
+<file path=ppt/slides/slide10.xml><?xml version="1.0" encoding="utf-8"?>
+<p:sld xmlns:a="http://schemas.openxmlformats.org/drawingml/2006/main" xmlns:p="http://schemas.openxmlformats.org/presentationml/2006/main" xmlns:r="http://schemas.openxmlformats.org/officeDocument/2006/relationships">
+  <p:cSld>
+    <p:spTree>
+      <p:nvGrpSpPr>
+        <p:cNvPr id="1" name=""/>
+        <p:cNvGrpSpPr/>
+        <p:nvPr/>
+      </p:nvGrpSpPr>
+      <p:grpSpPr/>
+      <p:sp>
+        <p:nvSpPr>
+          <p:cNvPr id="2" name="Rectangle 1"/>
+          <p:cNvSpPr/>
+          <p:nvPr/>
+        </p:nvSpPr>
+        <p:spPr>
+          <a:xfrm>
+            <a:off x="0" y="0"/>
+            <a:ext cx="12191695" cy="6858000"/>
+          </a:xfrm>
+          <a:prstGeom prst="rect">
+            <a:avLst/>
+          </a:prstGeom>
+          <a:solidFill>
+            <a:srgbClr val="FFFFFF"/>
+          </a:solidFill>
+          <a:ln>
+            <a:noFill/>
+          </a:ln>
+          <a:effectLst/>
+        </p:spPr>
+        <p:style>
+          <a:lnRef idx="1">
+            <a:schemeClr val="accent1"/>
+          </a:lnRef>
+          <a:fillRef idx="3">
+            <a:schemeClr val="accent1"/>
+          </a:fillRef>
+          <a:effectRef idx="2">
+            <a:schemeClr val="accent1"/>
+          </a:effectRef>
+          <a:fontRef idx="minor">
+            <a:schemeClr val="lt1"/>
+          </a:fontRef>
+        </p:style>
+        <p:txBody>
+          <a:bodyPr rtlCol="0" anchor="ctr"/>
+          <a:lstStyle/>
+          <a:p>
+            <a:pPr algn="ctr"/>
+          </a:p>
+        </p:txBody>
+      </p:sp>
+      <p:sp>
+        <p:nvSpPr>
+          <p:cNvPr id="3" name="Rounded Rectangle 2"/>
+          <p:cNvSpPr/>
+          <p:nvPr/>
+        </p:nvSpPr>
+        <p:spPr>
+          <a:xfrm>
+            <a:off x="457200" y="365760"/>
+            <a:ext cx="1645920" cy="320040"/>
+          </a:xfrm>
+          <a:prstGeom prst="roundRect">
+            <a:avLst/>
+          </a:prstGeom>
+          <a:solidFill>
+            <a:srgbClr val="0A8478"/>
+          </a:solidFill>
+          <a:ln>
+            <a:noFill/>
+          </a:ln>
+          <a:effectLst/>
+        </p:spPr>
+        <p:style>
+          <a:lnRef idx="1">
+            <a:schemeClr val="accent1"/>
+          </a:lnRef>
+          <a:fillRef idx="3">
+            <a:schemeClr val="accent1"/>
+          </a:fillRef>
+          <a:effectRef idx="2">
+            <a:schemeClr val="accent1"/>
+          </a:effectRef>
+          <a:fontRef idx="minor">
+            <a:schemeClr val="lt1"/>
+          </a:fontRef>
+        </p:style>
+        <p:txBody>
+          <a:bodyPr rtlCol="0" anchor="ctr"/>
+          <a:lstStyle/>
+          <a:p>
+            <a:pPr algn="ctr"/>
+            <a:r>
+              <a:rPr sz="1000" b="1">
+                <a:solidFill>
+                  <a:srgbClr val="FFFFFF"/>
+                </a:solidFill>
+              </a:rPr>
+              <a:t>CIERRE</a:t>
+            </a:r>
+          </a:p>
+        </p:txBody>
+      </p:sp>
+      <p:sp>
+        <p:nvSpPr>
+          <p:cNvPr id="4" name="TextBox 3"/>
+          <p:cNvSpPr txBox="1"/>
+          <p:nvPr/>
+        </p:nvSpPr>
+        <p:spPr>
+          <a:xfrm>
+            <a:off x="457200" y="822960"/>
+            <a:ext cx="11430000" cy="731520"/>
+          </a:xfrm>
+          <a:prstGeom prst="rect">
+            <a:avLst/>
+          </a:prstGeom>
+          <a:noFill/>
+        </p:spPr>
+        <p:txBody>
+          <a:bodyPr wrap="square" anchor="t">
+            <a:spAutoFit/>
+          </a:bodyPr>
+          <a:lstStyle/>
+          <a:p>
+            <a:pPr algn="l"/>
+            <a:r>
+              <a:rPr sz="2700" b="1">
+                <a:solidFill>
+                  <a:srgbClr val="0F2A36"/>
+                </a:solidFill>
+                <a:latin typeface="Calibri"/>
+              </a:rPr>
+              <a:t>Sprint 2 completo</a:t>
+            </a:r>
+          </a:p>
+        </p:txBody>
+      </p:sp>
+      <p:sp>
+        <p:nvSpPr>
+          <p:cNvPr id="5" name="TextBox 4"/>
+          <p:cNvSpPr txBox="1"/>
+          <p:nvPr/>
+        </p:nvSpPr>
+        <p:spPr>
+          <a:xfrm>
+            <a:off x="548640" y="1828800"/>
+            <a:ext cx="10972800" cy="2743200"/>
+          </a:xfrm>
+          <a:prstGeom prst="rect">
+            <a:avLst/>
+          </a:prstGeom>
+          <a:noFill/>
+        </p:spPr>
+        <p:txBody>
+          <a:bodyPr wrap="square">
+            <a:spAutoFit/>
+          </a:bodyPr>
+          <a:lstStyle/>
+          <a:p>
+            <a:pPr>
+              <a:spcAft>
+                <a:spcPts val="500"/>
+              </a:spcAft>
+            </a:pPr>
+            <a:r>
+              <a:rPr sz="1500">
+                <a:solidFill>
+                  <a:srgbClr val="0F2A36"/>
+                </a:solidFill>
+                <a:latin typeface="Calibri"/>
+              </a:rPr>
+              <a:t>•  Cancelar y reprogramar citas en produccion</a:t>
+            </a:r>
+          </a:p>
+          <a:p>
+            <a:pPr>
+              <a:spcAft>
+                <a:spcPts val="500"/>
+              </a:spcAft>
+            </a:pPr>
+            <a:r>
+              <a:rPr sz="1500">
+                <a:solidFill>
+                  <a:srgbClr val="0F2A36"/>
+                </a:solidFill>
+                <a:latin typeface="Calibri"/>
+              </a:rPr>
+              <a:t>•  6 bugs resueltos (calendario, cedula, validaciones, seguridad)</a:t>
+            </a:r>
+          </a:p>
+          <a:p>
+            <a:pPr>
+              <a:spcAft>
+                <a:spcPts val="500"/>
+              </a:spcAft>
+            </a:pPr>
+            <a:r>
+              <a:rPr sz="1500">
+                <a:solidFill>
+                  <a:srgbClr val="0F2A36"/>
+                </a:solidFill>
+                <a:latin typeface="Calibri"/>
+              </a:rPr>
+              <a:t>•  Auditoria de cambios con citas_historial</a:t>
+            </a:r>
+          </a:p>
+          <a:p>
+            <a:pPr>
+              <a:spcAft>
+                <a:spcPts val="500"/>
+              </a:spcAft>
+            </a:pPr>
+            <a:r>
+              <a:rPr sz="1500">
+                <a:solidFill>
+                  <a:srgbClr val="0F2A36"/>
+                </a:solidFill>
+                <a:latin typeface="Calibri"/>
+              </a:rPr>
+              <a:t>•  Hueco de seguridad RLS cerrado (B-26)</a:t>
+            </a:r>
+          </a:p>
+          <a:p>
+            <a:pPr>
+              <a:spcAft>
+                <a:spcPts val="500"/>
+              </a:spcAft>
+            </a:pPr>
+            <a:r>
+              <a:rPr sz="1500">
+                <a:solidFill>
+                  <a:srgbClr val="0F2A36"/>
+                </a:solidFill>
+                <a:latin typeface="Calibri"/>
+              </a:rPr>
+              <a:t>•  117 tests · build limpio · cero regresiones</a:t>
+            </a:r>
+          </a:p>
+        </p:txBody>
+      </p:sp>
+      <p:sp>
+        <p:nvSpPr>
+          <p:cNvPr id="6" name="Rectangle 5"/>
+          <p:cNvSpPr/>
+          <p:nvPr/>
+        </p:nvSpPr>
+        <p:spPr>
+          <a:xfrm>
+            <a:off x="457200" y="4937760"/>
+            <a:ext cx="11247120" cy="1097280"/>
+          </a:xfrm>
+          <a:prstGeom prst="rect">
+            <a:avLst/>
+          </a:prstGeom>
+          <a:solidFill>
+            <a:srgbClr val="0A4F6B"/>
+          </a:solidFill>
+          <a:ln>
+            <a:noFill/>
+          </a:ln>
+          <a:effectLst/>
+        </p:spPr>
+        <p:style>
+          <a:lnRef idx="1">
+            <a:schemeClr val="accent1"/>
+          </a:lnRef>
+          <a:fillRef idx="3">
+            <a:schemeClr val="accent1"/>
+          </a:fillRef>
+          <a:effectRef idx="2">
+            <a:schemeClr val="accent1"/>
+          </a:effectRef>
+          <a:fontRef idx="minor">
+            <a:schemeClr val="lt1"/>
+          </a:fontRef>
+        </p:style>
+        <p:txBody>
+          <a:bodyPr rtlCol="0" anchor="ctr"/>
+          <a:lstStyle/>
+          <a:p>
+            <a:pPr algn="ctr"/>
+          </a:p>
+        </p:txBody>
+      </p:sp>
+      <p:sp>
+        <p:nvSpPr>
+          <p:cNvPr id="7" name="TextBox 6"/>
+          <p:cNvSpPr txBox="1"/>
+          <p:nvPr/>
+        </p:nvSpPr>
+        <p:spPr>
+          <a:xfrm>
+            <a:off x="457200" y="5074920"/>
+            <a:ext cx="11247120" cy="457200"/>
+          </a:xfrm>
+          <a:prstGeom prst="rect">
+            <a:avLst/>
+          </a:prstGeom>
+          <a:noFill/>
+        </p:spPr>
+        <p:txBody>
+          <a:bodyPr wrap="square" anchor="t">
+            <a:spAutoFit/>
+          </a:bodyPr>
+          <a:lstStyle/>
+          <a:p>
+            <a:pPr algn="ctr"/>
+            <a:r>
+              <a:rPr sz="1500" b="1">
+                <a:solidFill>
+                  <a:srgbClr val="FFFFFF"/>
+                </a:solidFill>
+                <a:latin typeface="Calibri"/>
+              </a:rPr>
+              <a:t>Sprint 2 entregado. Siguiente: Sincronizacion entre sedes (Sprint 3).</a:t>
+            </a:r>
+          </a:p>
+        </p:txBody>
+      </p:sp>
+      <p:sp>
+        <p:nvSpPr>
+          <p:cNvPr id="8" name="TextBox 7"/>
+          <p:cNvSpPr txBox="1"/>
+          <p:nvPr/>
+        </p:nvSpPr>
+        <p:spPr>
+          <a:xfrm>
+            <a:off x="457200" y="5532120"/>
+            <a:ext cx="11247120" cy="365760"/>
+          </a:xfrm>
+          <a:prstGeom prst="rect">
+            <a:avLst/>
+          </a:prstGeom>
+          <a:noFill/>
+        </p:spPr>
+        <p:txBody>
+          <a:bodyPr wrap="square" anchor="t">
+            <a:spAutoFit/>
+          </a:bodyPr>
+          <a:lstStyle/>
+          <a:p>
+            <a:pPr algn="ctr"/>
+            <a:r>
+              <a:rPr sz="1400" b="0">
+                <a:solidFill>
+                  <a:srgbClr val="3DDC97"/>
+                </a:solidFill>
+                <a:latin typeface="Calibri"/>
+              </a:rPr>
+              <a:t>Gracias. Preguntas?</a:t>
+            </a:r>
+          </a:p>
+        </p:txBody>
+      </p:sp>
+      <p:sp>
+        <p:nvSpPr>
+          <p:cNvPr id="9" name="TextBox 8"/>
+          <p:cNvSpPr txBox="1"/>
+          <p:nvPr/>
+        </p:nvSpPr>
+        <p:spPr>
+          <a:xfrm>
+            <a:off x="365760" y="6446520"/>
+            <a:ext cx="8229600" cy="274320"/>
+          </a:xfrm>
+          <a:prstGeom prst="rect">
+            <a:avLst/>
+          </a:prstGeom>
+          <a:noFill/>
+        </p:spPr>
+        <p:txBody>
+          <a:bodyPr wrap="square" anchor="t">
+            <a:spAutoFit/>
+          </a:bodyPr>
+          <a:lstStyle/>
+          <a:p>
+            <a:pPr algn="l"/>
+            <a:r>
+              <a:rPr sz="900" b="0">
+                <a:solidFill>
+                  <a:srgbClr val="4A6B7A"/>
+                </a:solidFill>
+                <a:latin typeface="Calibri"/>
+              </a:rPr>
+              <a:t>Jose (PO) — cierre</a:t>
+            </a:r>
+          </a:p>
+        </p:txBody>
+      </p:sp>
+      <p:sp>
+        <p:nvSpPr>
+          <p:cNvPr id="10" name="TextBox 9"/>
+          <p:cNvSpPr txBox="1"/>
+          <p:nvPr/>
+        </p:nvSpPr>
+        <p:spPr>
+          <a:xfrm>
+            <a:off x="10972800" y="6446520"/>
+            <a:ext cx="914400" cy="274320"/>
+          </a:xfrm>
+          <a:prstGeom prst="rect">
+            <a:avLst/>
+          </a:prstGeom>
+          <a:noFill/>
+        </p:spPr>
+        <p:txBody>
+          <a:bodyPr wrap="square" anchor="t">
+            <a:spAutoFit/>
+          </a:bodyPr>
+          <a:lstStyle/>
+          <a:p>
+            <a:pPr algn="r"/>
+            <a:r>
+              <a:rPr sz="900" b="0">
+                <a:solidFill>
+                  <a:srgbClr val="4A6B7A"/>
+                </a:solidFill>
+                <a:latin typeface="Calibri"/>
+              </a:rPr>
+              <a:t>10 / 10</a:t>
             </a:r>
           </a:p>
         </p:txBody>
@@ -4396,7 +4834,7 @@
                 </a:solidFill>
                 <a:latin typeface="Calibri"/>
               </a:rPr>
-              <a:t>2 / 8</a:t>
+              <a:t>2 / 10</a:t>
             </a:r>
           </a:p>
         </p:txBody>
@@ -5196,7 +5634,7 @@
                 </a:solidFill>
                 <a:latin typeface="Calibri"/>
               </a:rPr>
-              <a:t>3 / 8</a:t>
+              <a:t>3 / 10</a:t>
             </a:r>
           </a:p>
         </p:txBody>
@@ -6147,7 +6585,7 @@
                 </a:solidFill>
                 <a:latin typeface="Calibri"/>
               </a:rPr>
-              <a:t>4 / 8</a:t>
+              <a:t>4 / 10</a:t>
             </a:r>
           </a:p>
         </p:txBody>
@@ -6766,7 +7204,7 @@
                 </a:solidFill>
                 <a:latin typeface="Calibri"/>
               </a:rPr>
-              <a:t>5 / 8</a:t>
+              <a:t>5 / 10</a:t>
             </a:r>
           </a:p>
         </p:txBody>
@@ -7467,7 +7905,7 @@
                 </a:solidFill>
                 <a:latin typeface="Calibri"/>
               </a:rPr>
-              <a:t>6 / 8</a:t>
+              <a:t>6 / 10</a:t>
             </a:r>
           </a:p>
         </p:txBody>
@@ -7543,7 +7981,7 @@
         <p:spPr>
           <a:xfrm>
             <a:off x="457200" y="365760"/>
-            <a:ext cx="1645920" cy="320040"/>
+            <a:ext cx="1463040" cy="320040"/>
           </a:xfrm>
           <a:prstGeom prst="roundRect">
             <a:avLst/>
@@ -7581,7 +8019,7 @@
                   <a:srgbClr val="FFFFFF"/>
                 </a:solidFill>
               </a:rPr>
-              <a:t>METRICAS SPRINT 2</a:t>
+              <a:t>DIAGRAMAS</a:t>
             </a:r>
           </a:p>
         </p:txBody>
@@ -7616,57 +8054,35 @@
                 </a:solidFill>
                 <a:latin typeface="Calibri"/>
               </a:rPr>
-              <a:t>Lo que medimos (ISTQB)</a:t>
-            </a:r>
-          </a:p>
-        </p:txBody>
-      </p:sp>
-      <p:sp>
-        <p:nvSpPr>
-          <p:cNvPr id="5" name="Rectangle 4"/>
-          <p:cNvSpPr/>
-          <p:nvPr/>
-        </p:nvSpPr>
-        <p:spPr>
-          <a:xfrm>
-            <a:off x="548640" y="1828800"/>
-            <a:ext cx="5394960" cy="1920240"/>
-          </a:xfrm>
-          <a:prstGeom prst="rect">
-            <a:avLst/>
-          </a:prstGeom>
-          <a:solidFill>
-            <a:srgbClr val="FFFFFF"/>
-          </a:solidFill>
-          <a:ln w="19050">
-            <a:solidFill>
-              <a:srgbClr val="0A8478"/>
-            </a:solidFill>
-          </a:ln>
-          <a:effectLst/>
-        </p:spPr>
-        <p:style>
-          <a:lnRef idx="1">
-            <a:schemeClr val="accent1"/>
-          </a:lnRef>
-          <a:fillRef idx="3">
-            <a:schemeClr val="accent1"/>
-          </a:fillRef>
-          <a:effectRef idx="2">
-            <a:schemeClr val="accent1"/>
-          </a:effectRef>
-          <a:fontRef idx="minor">
-            <a:schemeClr val="lt1"/>
-          </a:fontRef>
-        </p:style>
-        <p:txBody>
-          <a:bodyPr rtlCol="0" anchor="ctr"/>
-          <a:lstStyle/>
-          <a:p>
-            <a:pPr algn="ctr"/>
-          </a:p>
-        </p:txBody>
-      </p:sp>
+              <a:t>Flujo del usuario y arquitectura</a:t>
+            </a:r>
+          </a:p>
+        </p:txBody>
+      </p:sp>
+      <p:pic>
+        <p:nvPicPr>
+          <p:cNvPr id="5" name="Picture 4" descr="diagrama_flujo_usuario.png"/>
+          <p:cNvPicPr>
+            <a:picLocks noChangeAspect="1"/>
+          </p:cNvPicPr>
+          <p:nvPr/>
+        </p:nvPicPr>
+        <p:blipFill>
+          <a:blip r:embed="rId2"/>
+          <a:stretch>
+            <a:fillRect/>
+          </a:stretch>
+        </p:blipFill>
+        <p:spPr>
+          <a:xfrm>
+            <a:off x="640080" y="1737360"/>
+            <a:ext cx="1960150" cy="4572000"/>
+          </a:xfrm>
+          <a:prstGeom prst="rect">
+            <a:avLst/>
+          </a:prstGeom>
+        </p:spPr>
+      </p:pic>
       <p:sp>
         <p:nvSpPr>
           <p:cNvPr id="6" name="TextBox 5"/>
@@ -7675,8 +8091,8 @@
         </p:nvSpPr>
         <p:spPr>
           <a:xfrm>
-            <a:off x="731520" y="2011680"/>
-            <a:ext cx="2377440" cy="914400"/>
+            <a:off x="640080" y="6355080"/>
+            <a:ext cx="4114800" cy="274320"/>
           </a:xfrm>
           <a:prstGeom prst="rect">
             <a:avLst/>
@@ -7691,27 +8107,51 @@
           <a:p>
             <a:pPr algn="l"/>
             <a:r>
-              <a:rPr sz="4000" b="1">
-                <a:solidFill>
-                  <a:srgbClr val="0A8478"/>
-                </a:solidFill>
-                <a:latin typeface="Calibri"/>
-              </a:rPr>
-              <a:t>117</a:t>
-            </a:r>
-          </a:p>
-        </p:txBody>
-      </p:sp>
-      <p:sp>
-        <p:nvSpPr>
-          <p:cNvPr id="7" name="TextBox 6"/>
-          <p:cNvSpPr txBox="1"/>
-          <p:nvPr/>
-        </p:nvSpPr>
-        <p:spPr>
-          <a:xfrm>
-            <a:off x="2834640" y="2103120"/>
-            <a:ext cx="2926080" cy="548640"/>
+              <a:rPr sz="900" b="0">
+                <a:solidFill>
+                  <a:srgbClr val="4A6B7A"/>
+                </a:solidFill>
+                <a:latin typeface="Calibri"/>
+              </a:rPr>
+              <a:t>Fig 1. Flujo paciente/medico</a:t>
+            </a:r>
+          </a:p>
+        </p:txBody>
+      </p:sp>
+      <p:pic>
+        <p:nvPicPr>
+          <p:cNvPr id="7" name="Picture 6" descr="diagrama_arquitectura.png"/>
+          <p:cNvPicPr>
+            <a:picLocks noChangeAspect="1"/>
+          </p:cNvPicPr>
+          <p:nvPr/>
+        </p:nvPicPr>
+        <p:blipFill>
+          <a:blip r:embed="rId3"/>
+          <a:stretch>
+            <a:fillRect/>
+          </a:stretch>
+        </p:blipFill>
+        <p:spPr>
+          <a:xfrm>
+            <a:off x="5852160" y="1920240"/>
+            <a:ext cx="3464181" cy="4023360"/>
+          </a:xfrm>
+          <a:prstGeom prst="rect">
+            <a:avLst/>
+          </a:prstGeom>
+        </p:spPr>
+      </p:pic>
+      <p:sp>
+        <p:nvSpPr>
+          <p:cNvPr id="8" name="TextBox 7"/>
+          <p:cNvSpPr txBox="1"/>
+          <p:nvPr/>
+        </p:nvSpPr>
+        <p:spPr>
+          <a:xfrm>
+            <a:off x="5852160" y="6035040"/>
+            <a:ext cx="5486400" cy="274320"/>
           </a:xfrm>
           <a:prstGeom prst="rect">
             <a:avLst/>
@@ -7726,508 +8166,20 @@
           <a:p>
             <a:pPr algn="l"/>
             <a:r>
-              <a:rPr sz="1600" b="1">
-                <a:solidFill>
-                  <a:srgbClr val="0F2A36"/>
-                </a:solidFill>
-                <a:latin typeface="Calibri"/>
-              </a:rPr>
-              <a:t>Tests automatizados</a:t>
-            </a:r>
-          </a:p>
-        </p:txBody>
-      </p:sp>
-      <p:sp>
-        <p:nvSpPr>
-          <p:cNvPr id="8" name="TextBox 7"/>
-          <p:cNvSpPr txBox="1"/>
-          <p:nvPr/>
-        </p:nvSpPr>
-        <p:spPr>
-          <a:xfrm>
-            <a:off x="2834640" y="2743200"/>
-            <a:ext cx="2926080" cy="822960"/>
-          </a:xfrm>
-          <a:prstGeom prst="rect">
-            <a:avLst/>
-          </a:prstGeom>
-          <a:noFill/>
-        </p:spPr>
-        <p:txBody>
-          <a:bodyPr wrap="square" anchor="t">
-            <a:spAutoFit/>
-          </a:bodyPr>
-          <a:lstStyle/>
-          <a:p>
-            <a:pPr algn="l"/>
-            <a:r>
-              <a:rPr sz="1100" b="0">
+              <a:rPr sz="900" b="0">
                 <a:solidFill>
                   <a:srgbClr val="4A6B7A"/>
                 </a:solidFill>
                 <a:latin typeface="Calibri"/>
               </a:rPr>
-              <a:t>+52 vs Sprint 1. Todos pasan.</a:t>
-            </a:r>
-          </a:p>
-        </p:txBody>
-      </p:sp>
-      <p:sp>
-        <p:nvSpPr>
-          <p:cNvPr id="9" name="Rectangle 8"/>
-          <p:cNvSpPr/>
-          <p:nvPr/>
-        </p:nvSpPr>
-        <p:spPr>
-          <a:xfrm>
-            <a:off x="6126480" y="1828800"/>
-            <a:ext cx="5394960" cy="1920240"/>
-          </a:xfrm>
-          <a:prstGeom prst="rect">
-            <a:avLst/>
-          </a:prstGeom>
-          <a:solidFill>
-            <a:srgbClr val="FFFFFF"/>
-          </a:solidFill>
-          <a:ln w="19050">
-            <a:solidFill>
-              <a:srgbClr val="1FA89B"/>
-            </a:solidFill>
-          </a:ln>
-          <a:effectLst/>
-        </p:spPr>
-        <p:style>
-          <a:lnRef idx="1">
-            <a:schemeClr val="accent1"/>
-          </a:lnRef>
-          <a:fillRef idx="3">
-            <a:schemeClr val="accent1"/>
-          </a:fillRef>
-          <a:effectRef idx="2">
-            <a:schemeClr val="accent1"/>
-          </a:effectRef>
-          <a:fontRef idx="minor">
-            <a:schemeClr val="lt1"/>
-          </a:fontRef>
-        </p:style>
-        <p:txBody>
-          <a:bodyPr rtlCol="0" anchor="ctr"/>
-          <a:lstStyle/>
-          <a:p>
-            <a:pPr algn="ctr"/>
-          </a:p>
-        </p:txBody>
-      </p:sp>
-      <p:sp>
-        <p:nvSpPr>
-          <p:cNvPr id="10" name="TextBox 9"/>
-          <p:cNvSpPr txBox="1"/>
-          <p:nvPr/>
-        </p:nvSpPr>
-        <p:spPr>
-          <a:xfrm>
-            <a:off x="6309360" y="2011680"/>
-            <a:ext cx="2377440" cy="914400"/>
-          </a:xfrm>
-          <a:prstGeom prst="rect">
-            <a:avLst/>
-          </a:prstGeom>
-          <a:noFill/>
-        </p:spPr>
-        <p:txBody>
-          <a:bodyPr wrap="square" anchor="t">
-            <a:spAutoFit/>
-          </a:bodyPr>
-          <a:lstStyle/>
-          <a:p>
-            <a:pPr algn="l"/>
-            <a:r>
-              <a:rPr sz="4000" b="1">
-                <a:solidFill>
-                  <a:srgbClr val="1FA89B"/>
-                </a:solidFill>
-                <a:latin typeface="Calibri"/>
-              </a:rPr>
-              <a:t>0</a:t>
-            </a:r>
-          </a:p>
-        </p:txBody>
-      </p:sp>
-      <p:sp>
-        <p:nvSpPr>
-          <p:cNvPr id="11" name="TextBox 10"/>
-          <p:cNvSpPr txBox="1"/>
-          <p:nvPr/>
-        </p:nvSpPr>
-        <p:spPr>
-          <a:xfrm>
-            <a:off x="8412480" y="2103120"/>
-            <a:ext cx="2926080" cy="548640"/>
-          </a:xfrm>
-          <a:prstGeom prst="rect">
-            <a:avLst/>
-          </a:prstGeom>
-          <a:noFill/>
-        </p:spPr>
-        <p:txBody>
-          <a:bodyPr wrap="square" anchor="t">
-            <a:spAutoFit/>
-          </a:bodyPr>
-          <a:lstStyle/>
-          <a:p>
-            <a:pPr algn="l"/>
-            <a:r>
-              <a:rPr sz="1600" b="1">
-                <a:solidFill>
-                  <a:srgbClr val="0F2A36"/>
-                </a:solidFill>
-                <a:latin typeface="Calibri"/>
-              </a:rPr>
-              <a:t>Bugs pendientes</a:t>
-            </a:r>
-          </a:p>
-        </p:txBody>
-      </p:sp>
-      <p:sp>
-        <p:nvSpPr>
-          <p:cNvPr id="12" name="TextBox 11"/>
-          <p:cNvSpPr txBox="1"/>
-          <p:nvPr/>
-        </p:nvSpPr>
-        <p:spPr>
-          <a:xfrm>
-            <a:off x="8412480" y="2743200"/>
-            <a:ext cx="2926080" cy="822960"/>
-          </a:xfrm>
-          <a:prstGeom prst="rect">
-            <a:avLst/>
-          </a:prstGeom>
-          <a:noFill/>
-        </p:spPr>
-        <p:txBody>
-          <a:bodyPr wrap="square" anchor="t">
-            <a:spAutoFit/>
-          </a:bodyPr>
-          <a:lstStyle/>
-          <a:p>
-            <a:pPr algn="l"/>
-            <a:r>
-              <a:rPr sz="1100" b="0">
-                <a:solidFill>
-                  <a:srgbClr val="4A6B7A"/>
-                </a:solidFill>
-                <a:latin typeface="Calibri"/>
-              </a:rPr>
-              <a:t>6 detectados, 6 resueltos.</a:t>
-            </a:r>
-          </a:p>
-        </p:txBody>
-      </p:sp>
-      <p:sp>
-        <p:nvSpPr>
-          <p:cNvPr id="13" name="Rectangle 12"/>
-          <p:cNvSpPr/>
-          <p:nvPr/>
-        </p:nvSpPr>
-        <p:spPr>
-          <a:xfrm>
-            <a:off x="548640" y="3931920"/>
-            <a:ext cx="5394960" cy="1920240"/>
-          </a:xfrm>
-          <a:prstGeom prst="rect">
-            <a:avLst/>
-          </a:prstGeom>
-          <a:solidFill>
-            <a:srgbClr val="FFFFFF"/>
-          </a:solidFill>
-          <a:ln w="19050">
-            <a:solidFill>
-              <a:srgbClr val="3DDC97"/>
-            </a:solidFill>
-          </a:ln>
-          <a:effectLst/>
-        </p:spPr>
-        <p:style>
-          <a:lnRef idx="1">
-            <a:schemeClr val="accent1"/>
-          </a:lnRef>
-          <a:fillRef idx="3">
-            <a:schemeClr val="accent1"/>
-          </a:fillRef>
-          <a:effectRef idx="2">
-            <a:schemeClr val="accent1"/>
-          </a:effectRef>
-          <a:fontRef idx="minor">
-            <a:schemeClr val="lt1"/>
-          </a:fontRef>
-        </p:style>
-        <p:txBody>
-          <a:bodyPr rtlCol="0" anchor="ctr"/>
-          <a:lstStyle/>
-          <a:p>
-            <a:pPr algn="ctr"/>
-          </a:p>
-        </p:txBody>
-      </p:sp>
-      <p:sp>
-        <p:nvSpPr>
-          <p:cNvPr id="14" name="TextBox 13"/>
-          <p:cNvSpPr txBox="1"/>
-          <p:nvPr/>
-        </p:nvSpPr>
-        <p:spPr>
-          <a:xfrm>
-            <a:off x="731520" y="4114800"/>
-            <a:ext cx="2377440" cy="914400"/>
-          </a:xfrm>
-          <a:prstGeom prst="rect">
-            <a:avLst/>
-          </a:prstGeom>
-          <a:noFill/>
-        </p:spPr>
-        <p:txBody>
-          <a:bodyPr wrap="square" anchor="t">
-            <a:spAutoFit/>
-          </a:bodyPr>
-          <a:lstStyle/>
-          <a:p>
-            <a:pPr algn="l"/>
-            <a:r>
-              <a:rPr sz="4000" b="1">
-                <a:solidFill>
-                  <a:srgbClr val="3DDC97"/>
-                </a:solidFill>
-                <a:latin typeface="Calibri"/>
-              </a:rPr>
-              <a:t>503 KB</a:t>
-            </a:r>
-          </a:p>
-        </p:txBody>
-      </p:sp>
-      <p:sp>
-        <p:nvSpPr>
-          <p:cNvPr id="15" name="TextBox 14"/>
-          <p:cNvSpPr txBox="1"/>
-          <p:nvPr/>
-        </p:nvSpPr>
-        <p:spPr>
-          <a:xfrm>
-            <a:off x="2834640" y="4206240"/>
-            <a:ext cx="2926080" cy="548640"/>
-          </a:xfrm>
-          <a:prstGeom prst="rect">
-            <a:avLst/>
-          </a:prstGeom>
-          <a:noFill/>
-        </p:spPr>
-        <p:txBody>
-          <a:bodyPr wrap="square" anchor="t">
-            <a:spAutoFit/>
-          </a:bodyPr>
-          <a:lstStyle/>
-          <a:p>
-            <a:pPr algn="l"/>
-            <a:r>
-              <a:rPr sz="1600" b="1">
-                <a:solidFill>
-                  <a:srgbClr val="0F2A36"/>
-                </a:solidFill>
-                <a:latin typeface="Calibri"/>
-              </a:rPr>
-              <a:t>Bundle (gzip 143 KB)</a:t>
-            </a:r>
-          </a:p>
-        </p:txBody>
-      </p:sp>
-      <p:sp>
-        <p:nvSpPr>
-          <p:cNvPr id="16" name="TextBox 15"/>
-          <p:cNvSpPr txBox="1"/>
-          <p:nvPr/>
-        </p:nvSpPr>
-        <p:spPr>
-          <a:xfrm>
-            <a:off x="2834640" y="4846320"/>
-            <a:ext cx="2926080" cy="822960"/>
-          </a:xfrm>
-          <a:prstGeom prst="rect">
-            <a:avLst/>
-          </a:prstGeom>
-          <a:noFill/>
-        </p:spPr>
-        <p:txBody>
-          <a:bodyPr wrap="square" anchor="t">
-            <a:spAutoFit/>
-          </a:bodyPr>
-          <a:lstStyle/>
-          <a:p>
-            <a:pPr algn="l"/>
-            <a:r>
-              <a:rPr sz="1100" b="0">
-                <a:solidFill>
-                  <a:srgbClr val="4A6B7A"/>
-                </a:solidFill>
-                <a:latin typeface="Calibri"/>
-              </a:rPr>
-              <a:t>Bajo de 754 KB (sin FullCalendar).</a:t>
-            </a:r>
-          </a:p>
-        </p:txBody>
-      </p:sp>
-      <p:sp>
-        <p:nvSpPr>
-          <p:cNvPr id="17" name="Rectangle 16"/>
-          <p:cNvSpPr/>
-          <p:nvPr/>
-        </p:nvSpPr>
-        <p:spPr>
-          <a:xfrm>
-            <a:off x="6126480" y="3931920"/>
-            <a:ext cx="5394960" cy="1920240"/>
-          </a:xfrm>
-          <a:prstGeom prst="rect">
-            <a:avLst/>
-          </a:prstGeom>
-          <a:solidFill>
-            <a:srgbClr val="FFFFFF"/>
-          </a:solidFill>
-          <a:ln w="19050">
-            <a:solidFill>
-              <a:srgbClr val="CA8A04"/>
-            </a:solidFill>
-          </a:ln>
-          <a:effectLst/>
-        </p:spPr>
-        <p:style>
-          <a:lnRef idx="1">
-            <a:schemeClr val="accent1"/>
-          </a:lnRef>
-          <a:fillRef idx="3">
-            <a:schemeClr val="accent1"/>
-          </a:fillRef>
-          <a:effectRef idx="2">
-            <a:schemeClr val="accent1"/>
-          </a:effectRef>
-          <a:fontRef idx="minor">
-            <a:schemeClr val="lt1"/>
-          </a:fontRef>
-        </p:style>
-        <p:txBody>
-          <a:bodyPr rtlCol="0" anchor="ctr"/>
-          <a:lstStyle/>
-          <a:p>
-            <a:pPr algn="ctr"/>
-          </a:p>
-        </p:txBody>
-      </p:sp>
-      <p:sp>
-        <p:nvSpPr>
-          <p:cNvPr id="18" name="TextBox 17"/>
-          <p:cNvSpPr txBox="1"/>
-          <p:nvPr/>
-        </p:nvSpPr>
-        <p:spPr>
-          <a:xfrm>
-            <a:off x="6309360" y="4114800"/>
-            <a:ext cx="2377440" cy="914400"/>
-          </a:xfrm>
-          <a:prstGeom prst="rect">
-            <a:avLst/>
-          </a:prstGeom>
-          <a:noFill/>
-        </p:spPr>
-        <p:txBody>
-          <a:bodyPr wrap="square" anchor="t">
-            <a:spAutoFit/>
-          </a:bodyPr>
-          <a:lstStyle/>
-          <a:p>
-            <a:pPr algn="l"/>
-            <a:r>
-              <a:rPr sz="4000" b="1">
-                <a:solidFill>
-                  <a:srgbClr val="CA8A04"/>
-                </a:solidFill>
-                <a:latin typeface="Calibri"/>
-              </a:rPr>
-              <a:t>3</a:t>
-            </a:r>
-          </a:p>
-        </p:txBody>
-      </p:sp>
-      <p:sp>
-        <p:nvSpPr>
-          <p:cNvPr id="19" name="TextBox 18"/>
-          <p:cNvSpPr txBox="1"/>
-          <p:nvPr/>
-        </p:nvSpPr>
-        <p:spPr>
-          <a:xfrm>
-            <a:off x="8412480" y="4206240"/>
-            <a:ext cx="2926080" cy="548640"/>
-          </a:xfrm>
-          <a:prstGeom prst="rect">
-            <a:avLst/>
-          </a:prstGeom>
-          <a:noFill/>
-        </p:spPr>
-        <p:txBody>
-          <a:bodyPr wrap="square" anchor="t">
-            <a:spAutoFit/>
-          </a:bodyPr>
-          <a:lstStyle/>
-          <a:p>
-            <a:pPr algn="l"/>
-            <a:r>
-              <a:rPr sz="1600" b="1">
-                <a:solidFill>
-                  <a:srgbClr val="0F2A36"/>
-                </a:solidFill>
-                <a:latin typeface="Calibri"/>
-              </a:rPr>
-              <a:t>Funciones SQL atomicas</a:t>
-            </a:r>
-          </a:p>
-        </p:txBody>
-      </p:sp>
-      <p:sp>
-        <p:nvSpPr>
-          <p:cNvPr id="20" name="TextBox 19"/>
-          <p:cNvSpPr txBox="1"/>
-          <p:nvPr/>
-        </p:nvSpPr>
-        <p:spPr>
-          <a:xfrm>
-            <a:off x="8412480" y="4846320"/>
-            <a:ext cx="2926080" cy="822960"/>
-          </a:xfrm>
-          <a:prstGeom prst="rect">
-            <a:avLst/>
-          </a:prstGeom>
-          <a:noFill/>
-        </p:spPr>
-        <p:txBody>
-          <a:bodyPr wrap="square" anchor="t">
-            <a:spAutoFit/>
-          </a:bodyPr>
-          <a:lstStyle/>
-          <a:p>
-            <a:pPr algn="l"/>
-            <a:r>
-              <a:rPr sz="1100" b="0">
-                <a:solidFill>
-                  <a:srgbClr val="4A6B7A"/>
-                </a:solidFill>
-                <a:latin typeface="Calibri"/>
-              </a:rPr>
-              <a:t>crear / cancelar / reprogramar.</a:t>
-            </a:r>
-          </a:p>
-        </p:txBody>
-      </p:sp>
-      <p:sp>
-        <p:nvSpPr>
-          <p:cNvPr id="21" name="TextBox 20"/>
+              <a:t>Fig 2. Arquitectura: GitHub -&gt; Railway -&gt; React -&gt; Supabase (RLS)</a:t>
+            </a:r>
+          </a:p>
+        </p:txBody>
+      </p:sp>
+      <p:sp>
+        <p:nvSpPr>
+          <p:cNvPr id="9" name="TextBox 8"/>
           <p:cNvSpPr txBox="1"/>
           <p:nvPr/>
         </p:nvSpPr>
@@ -8255,14 +8207,14 @@
                 </a:solidFill>
                 <a:latin typeface="Calibri"/>
               </a:rPr>
-              <a:t>Jose (PO) — 40s</a:t>
-            </a:r>
-          </a:p>
-        </p:txBody>
-      </p:sp>
-      <p:sp>
-        <p:nvSpPr>
-          <p:cNvPr id="22" name="TextBox 21"/>
+              <a:t>Ethan / Alejandro — diagramas (evidencia)</a:t>
+            </a:r>
+          </a:p>
+        </p:txBody>
+      </p:sp>
+      <p:sp>
+        <p:nvSpPr>
+          <p:cNvPr id="10" name="TextBox 9"/>
           <p:cNvSpPr txBox="1"/>
           <p:nvPr/>
         </p:nvSpPr>
@@ -8290,7 +8242,7 @@
                 </a:solidFill>
                 <a:latin typeface="Calibri"/>
               </a:rPr>
-              <a:t>7 / 8</a:t>
+              <a:t>7 / 10</a:t>
             </a:r>
           </a:p>
         </p:txBody>
@@ -8366,7 +8318,7 @@
         <p:spPr>
           <a:xfrm>
             <a:off x="457200" y="365760"/>
-            <a:ext cx="1645920" cy="320040"/>
+            <a:ext cx="1920240" cy="320040"/>
           </a:xfrm>
           <a:prstGeom prst="roundRect">
             <a:avLst/>
@@ -8404,7 +8356,7 @@
                   <a:srgbClr val="FFFFFF"/>
                 </a:solidFill>
               </a:rPr>
-              <a:t>CIERRE</a:t>
+              <a:t>MEDICION (UNIDAD II)</a:t>
             </a:r>
           </a:p>
         </p:txBody>
@@ -8439,7 +8391,7 @@
                 </a:solidFill>
                 <a:latin typeface="Calibri"/>
               </a:rPr>
-              <a:t>Sprint 2 completo</a:t>
+              <a:t>ISTQB · TMMi · TQM</a:t>
             </a:r>
           </a:p>
         </p:txBody>
@@ -8452,8 +8404,586 @@
         </p:nvSpPr>
         <p:spPr>
           <a:xfrm>
-            <a:off x="548640" y="1828800"/>
-            <a:ext cx="10972800" cy="2743200"/>
+            <a:off x="457200" y="1600200"/>
+            <a:ext cx="5486400" cy="365760"/>
+          </a:xfrm>
+          <a:prstGeom prst="rect">
+            <a:avLst/>
+          </a:prstGeom>
+          <a:noFill/>
+        </p:spPr>
+        <p:txBody>
+          <a:bodyPr wrap="square" anchor="t">
+            <a:spAutoFit/>
+          </a:bodyPr>
+          <a:lstStyle/>
+          <a:p>
+            <a:pPr algn="l"/>
+            <a:r>
+              <a:rPr sz="1300" b="1">
+                <a:solidFill>
+                  <a:srgbClr val="0A4F6B"/>
+                </a:solidFill>
+                <a:latin typeface="Calibri"/>
+              </a:rPr>
+              <a:t>ISTQB — metricas</a:t>
+            </a:r>
+          </a:p>
+        </p:txBody>
+      </p:sp>
+      <p:sp>
+        <p:nvSpPr>
+          <p:cNvPr id="6" name="Rectangle 5"/>
+          <p:cNvSpPr/>
+          <p:nvPr/>
+        </p:nvSpPr>
+        <p:spPr>
+          <a:xfrm>
+            <a:off x="457200" y="2011680"/>
+            <a:ext cx="2606040" cy="1005840"/>
+          </a:xfrm>
+          <a:prstGeom prst="rect">
+            <a:avLst/>
+          </a:prstGeom>
+          <a:solidFill>
+            <a:srgbClr val="FFFFFF"/>
+          </a:solidFill>
+          <a:ln w="15240">
+            <a:solidFill>
+              <a:srgbClr val="0A8478"/>
+            </a:solidFill>
+          </a:ln>
+          <a:effectLst/>
+        </p:spPr>
+        <p:style>
+          <a:lnRef idx="1">
+            <a:schemeClr val="accent1"/>
+          </a:lnRef>
+          <a:fillRef idx="3">
+            <a:schemeClr val="accent1"/>
+          </a:fillRef>
+          <a:effectRef idx="2">
+            <a:schemeClr val="accent1"/>
+          </a:effectRef>
+          <a:fontRef idx="minor">
+            <a:schemeClr val="lt1"/>
+          </a:fontRef>
+        </p:style>
+        <p:txBody>
+          <a:bodyPr rtlCol="0" anchor="ctr"/>
+          <a:lstStyle/>
+          <a:p>
+            <a:pPr algn="ctr"/>
+          </a:p>
+        </p:txBody>
+      </p:sp>
+      <p:sp>
+        <p:nvSpPr>
+          <p:cNvPr id="7" name="TextBox 6"/>
+          <p:cNvSpPr txBox="1"/>
+          <p:nvPr/>
+        </p:nvSpPr>
+        <p:spPr>
+          <a:xfrm>
+            <a:off x="594360" y="2103120"/>
+            <a:ext cx="2377440" cy="548640"/>
+          </a:xfrm>
+          <a:prstGeom prst="rect">
+            <a:avLst/>
+          </a:prstGeom>
+          <a:noFill/>
+        </p:spPr>
+        <p:txBody>
+          <a:bodyPr wrap="square" anchor="t">
+            <a:spAutoFit/>
+          </a:bodyPr>
+          <a:lstStyle/>
+          <a:p>
+            <a:pPr algn="l"/>
+            <a:r>
+              <a:rPr sz="2400" b="1">
+                <a:solidFill>
+                  <a:srgbClr val="0A8478"/>
+                </a:solidFill>
+                <a:latin typeface="Calibri"/>
+              </a:rPr>
+              <a:t>117</a:t>
+            </a:r>
+          </a:p>
+        </p:txBody>
+      </p:sp>
+      <p:sp>
+        <p:nvSpPr>
+          <p:cNvPr id="8" name="TextBox 7"/>
+          <p:cNvSpPr txBox="1"/>
+          <p:nvPr/>
+        </p:nvSpPr>
+        <p:spPr>
+          <a:xfrm>
+            <a:off x="594360" y="2651760"/>
+            <a:ext cx="2377440" cy="320040"/>
+          </a:xfrm>
+          <a:prstGeom prst="rect">
+            <a:avLst/>
+          </a:prstGeom>
+          <a:noFill/>
+        </p:spPr>
+        <p:txBody>
+          <a:bodyPr wrap="square" anchor="t">
+            <a:spAutoFit/>
+          </a:bodyPr>
+          <a:lstStyle/>
+          <a:p>
+            <a:pPr algn="l"/>
+            <a:r>
+              <a:rPr sz="1000" b="0">
+                <a:solidFill>
+                  <a:srgbClr val="4A6B7A"/>
+                </a:solidFill>
+                <a:latin typeface="Calibri"/>
+              </a:rPr>
+              <a:t>tests pasan</a:t>
+            </a:r>
+          </a:p>
+        </p:txBody>
+      </p:sp>
+      <p:sp>
+        <p:nvSpPr>
+          <p:cNvPr id="9" name="Rectangle 8"/>
+          <p:cNvSpPr/>
+          <p:nvPr/>
+        </p:nvSpPr>
+        <p:spPr>
+          <a:xfrm>
+            <a:off x="3200400" y="2011680"/>
+            <a:ext cx="2606040" cy="1005840"/>
+          </a:xfrm>
+          <a:prstGeom prst="rect">
+            <a:avLst/>
+          </a:prstGeom>
+          <a:solidFill>
+            <a:srgbClr val="FFFFFF"/>
+          </a:solidFill>
+          <a:ln w="15240">
+            <a:solidFill>
+              <a:srgbClr val="0A8478"/>
+            </a:solidFill>
+          </a:ln>
+          <a:effectLst/>
+        </p:spPr>
+        <p:style>
+          <a:lnRef idx="1">
+            <a:schemeClr val="accent1"/>
+          </a:lnRef>
+          <a:fillRef idx="3">
+            <a:schemeClr val="accent1"/>
+          </a:fillRef>
+          <a:effectRef idx="2">
+            <a:schemeClr val="accent1"/>
+          </a:effectRef>
+          <a:fontRef idx="minor">
+            <a:schemeClr val="lt1"/>
+          </a:fontRef>
+        </p:style>
+        <p:txBody>
+          <a:bodyPr rtlCol="0" anchor="ctr"/>
+          <a:lstStyle/>
+          <a:p>
+            <a:pPr algn="ctr"/>
+          </a:p>
+        </p:txBody>
+      </p:sp>
+      <p:sp>
+        <p:nvSpPr>
+          <p:cNvPr id="10" name="TextBox 9"/>
+          <p:cNvSpPr txBox="1"/>
+          <p:nvPr/>
+        </p:nvSpPr>
+        <p:spPr>
+          <a:xfrm>
+            <a:off x="3337560" y="2103120"/>
+            <a:ext cx="2377440" cy="548640"/>
+          </a:xfrm>
+          <a:prstGeom prst="rect">
+            <a:avLst/>
+          </a:prstGeom>
+          <a:noFill/>
+        </p:spPr>
+        <p:txBody>
+          <a:bodyPr wrap="square" anchor="t">
+            <a:spAutoFit/>
+          </a:bodyPr>
+          <a:lstStyle/>
+          <a:p>
+            <a:pPr algn="l"/>
+            <a:r>
+              <a:rPr sz="2400" b="1">
+                <a:solidFill>
+                  <a:srgbClr val="0A8478"/>
+                </a:solidFill>
+                <a:latin typeface="Calibri"/>
+              </a:rPr>
+              <a:t>61.4%</a:t>
+            </a:r>
+          </a:p>
+        </p:txBody>
+      </p:sp>
+      <p:sp>
+        <p:nvSpPr>
+          <p:cNvPr id="11" name="TextBox 10"/>
+          <p:cNvSpPr txBox="1"/>
+          <p:nvPr/>
+        </p:nvSpPr>
+        <p:spPr>
+          <a:xfrm>
+            <a:off x="3337560" y="2651760"/>
+            <a:ext cx="2377440" cy="320040"/>
+          </a:xfrm>
+          <a:prstGeom prst="rect">
+            <a:avLst/>
+          </a:prstGeom>
+          <a:noFill/>
+        </p:spPr>
+        <p:txBody>
+          <a:bodyPr wrap="square" anchor="t">
+            <a:spAutoFit/>
+          </a:bodyPr>
+          <a:lstStyle/>
+          <a:p>
+            <a:pPr algn="l"/>
+            <a:r>
+              <a:rPr sz="1000" b="0">
+                <a:solidFill>
+                  <a:srgbClr val="4A6B7A"/>
+                </a:solidFill>
+                <a:latin typeface="Calibri"/>
+              </a:rPr>
+              <a:t>cobertura</a:t>
+            </a:r>
+          </a:p>
+        </p:txBody>
+      </p:sp>
+      <p:sp>
+        <p:nvSpPr>
+          <p:cNvPr id="12" name="Rectangle 11"/>
+          <p:cNvSpPr/>
+          <p:nvPr/>
+        </p:nvSpPr>
+        <p:spPr>
+          <a:xfrm>
+            <a:off x="457200" y="3154680"/>
+            <a:ext cx="2606040" cy="1005840"/>
+          </a:xfrm>
+          <a:prstGeom prst="rect">
+            <a:avLst/>
+          </a:prstGeom>
+          <a:solidFill>
+            <a:srgbClr val="FFFFFF"/>
+          </a:solidFill>
+          <a:ln w="15240">
+            <a:solidFill>
+              <a:srgbClr val="0A8478"/>
+            </a:solidFill>
+          </a:ln>
+          <a:effectLst/>
+        </p:spPr>
+        <p:style>
+          <a:lnRef idx="1">
+            <a:schemeClr val="accent1"/>
+          </a:lnRef>
+          <a:fillRef idx="3">
+            <a:schemeClr val="accent1"/>
+          </a:fillRef>
+          <a:effectRef idx="2">
+            <a:schemeClr val="accent1"/>
+          </a:effectRef>
+          <a:fontRef idx="minor">
+            <a:schemeClr val="lt1"/>
+          </a:fontRef>
+        </p:style>
+        <p:txBody>
+          <a:bodyPr rtlCol="0" anchor="ctr"/>
+          <a:lstStyle/>
+          <a:p>
+            <a:pPr algn="ctr"/>
+          </a:p>
+        </p:txBody>
+      </p:sp>
+      <p:sp>
+        <p:nvSpPr>
+          <p:cNvPr id="13" name="TextBox 12"/>
+          <p:cNvSpPr txBox="1"/>
+          <p:nvPr/>
+        </p:nvSpPr>
+        <p:spPr>
+          <a:xfrm>
+            <a:off x="594360" y="3246120"/>
+            <a:ext cx="2377440" cy="548640"/>
+          </a:xfrm>
+          <a:prstGeom prst="rect">
+            <a:avLst/>
+          </a:prstGeom>
+          <a:noFill/>
+        </p:spPr>
+        <p:txBody>
+          <a:bodyPr wrap="square" anchor="t">
+            <a:spAutoFit/>
+          </a:bodyPr>
+          <a:lstStyle/>
+          <a:p>
+            <a:pPr algn="l"/>
+            <a:r>
+              <a:rPr sz="2400" b="1">
+                <a:solidFill>
+                  <a:srgbClr val="0A8478"/>
+                </a:solidFill>
+                <a:latin typeface="Calibri"/>
+              </a:rPr>
+              <a:t>300 ms</a:t>
+            </a:r>
+          </a:p>
+        </p:txBody>
+      </p:sp>
+      <p:sp>
+        <p:nvSpPr>
+          <p:cNvPr id="14" name="TextBox 13"/>
+          <p:cNvSpPr txBox="1"/>
+          <p:nvPr/>
+        </p:nvSpPr>
+        <p:spPr>
+          <a:xfrm>
+            <a:off x="594360" y="3794760"/>
+            <a:ext cx="2377440" cy="320040"/>
+          </a:xfrm>
+          <a:prstGeom prst="rect">
+            <a:avLst/>
+          </a:prstGeom>
+          <a:noFill/>
+        </p:spPr>
+        <p:txBody>
+          <a:bodyPr wrap="square" anchor="t">
+            <a:spAutoFit/>
+          </a:bodyPr>
+          <a:lstStyle/>
+          <a:p>
+            <a:pPr algn="l"/>
+            <a:r>
+              <a:rPr sz="1000" b="0">
+                <a:solidFill>
+                  <a:srgbClr val="4A6B7A"/>
+                </a:solidFill>
+                <a:latin typeface="Calibri"/>
+              </a:rPr>
+              <a:t>P95 200 users</a:t>
+            </a:r>
+          </a:p>
+        </p:txBody>
+      </p:sp>
+      <p:sp>
+        <p:nvSpPr>
+          <p:cNvPr id="15" name="Rectangle 14"/>
+          <p:cNvSpPr/>
+          <p:nvPr/>
+        </p:nvSpPr>
+        <p:spPr>
+          <a:xfrm>
+            <a:off x="3200400" y="3154680"/>
+            <a:ext cx="2606040" cy="1005840"/>
+          </a:xfrm>
+          <a:prstGeom prst="rect">
+            <a:avLst/>
+          </a:prstGeom>
+          <a:solidFill>
+            <a:srgbClr val="FFFFFF"/>
+          </a:solidFill>
+          <a:ln w="15240">
+            <a:solidFill>
+              <a:srgbClr val="0A8478"/>
+            </a:solidFill>
+          </a:ln>
+          <a:effectLst/>
+        </p:spPr>
+        <p:style>
+          <a:lnRef idx="1">
+            <a:schemeClr val="accent1"/>
+          </a:lnRef>
+          <a:fillRef idx="3">
+            <a:schemeClr val="accent1"/>
+          </a:fillRef>
+          <a:effectRef idx="2">
+            <a:schemeClr val="accent1"/>
+          </a:effectRef>
+          <a:fontRef idx="minor">
+            <a:schemeClr val="lt1"/>
+          </a:fontRef>
+        </p:style>
+        <p:txBody>
+          <a:bodyPr rtlCol="0" anchor="ctr"/>
+          <a:lstStyle/>
+          <a:p>
+            <a:pPr algn="ctr"/>
+          </a:p>
+        </p:txBody>
+      </p:sp>
+      <p:sp>
+        <p:nvSpPr>
+          <p:cNvPr id="16" name="TextBox 15"/>
+          <p:cNvSpPr txBox="1"/>
+          <p:nvPr/>
+        </p:nvSpPr>
+        <p:spPr>
+          <a:xfrm>
+            <a:off x="3337560" y="3246120"/>
+            <a:ext cx="2377440" cy="548640"/>
+          </a:xfrm>
+          <a:prstGeom prst="rect">
+            <a:avLst/>
+          </a:prstGeom>
+          <a:noFill/>
+        </p:spPr>
+        <p:txBody>
+          <a:bodyPr wrap="square" anchor="t">
+            <a:spAutoFit/>
+          </a:bodyPr>
+          <a:lstStyle/>
+          <a:p>
+            <a:pPr algn="l"/>
+            <a:r>
+              <a:rPr sz="2400" b="1">
+                <a:solidFill>
+                  <a:srgbClr val="0A8478"/>
+                </a:solidFill>
+                <a:latin typeface="Calibri"/>
+              </a:rPr>
+              <a:t>6/0</a:t>
+            </a:r>
+          </a:p>
+        </p:txBody>
+      </p:sp>
+      <p:sp>
+        <p:nvSpPr>
+          <p:cNvPr id="17" name="TextBox 16"/>
+          <p:cNvSpPr txBox="1"/>
+          <p:nvPr/>
+        </p:nvSpPr>
+        <p:spPr>
+          <a:xfrm>
+            <a:off x="3337560" y="3794760"/>
+            <a:ext cx="2377440" cy="320040"/>
+          </a:xfrm>
+          <a:prstGeom prst="rect">
+            <a:avLst/>
+          </a:prstGeom>
+          <a:noFill/>
+        </p:spPr>
+        <p:txBody>
+          <a:bodyPr wrap="square" anchor="t">
+            <a:spAutoFit/>
+          </a:bodyPr>
+          <a:lstStyle/>
+          <a:p>
+            <a:pPr algn="l"/>
+            <a:r>
+              <a:rPr sz="1000" b="0">
+                <a:solidFill>
+                  <a:srgbClr val="4A6B7A"/>
+                </a:solidFill>
+                <a:latin typeface="Calibri"/>
+              </a:rPr>
+              <a:t>bugs res./pend.</a:t>
+            </a:r>
+          </a:p>
+        </p:txBody>
+      </p:sp>
+      <p:sp>
+        <p:nvSpPr>
+          <p:cNvPr id="18" name="Rectangle 17"/>
+          <p:cNvSpPr/>
+          <p:nvPr/>
+        </p:nvSpPr>
+        <p:spPr>
+          <a:xfrm>
+            <a:off x="6035040" y="1554480"/>
+            <a:ext cx="18288" cy="4754880"/>
+          </a:xfrm>
+          <a:prstGeom prst="rect">
+            <a:avLst/>
+          </a:prstGeom>
+          <a:solidFill>
+            <a:srgbClr val="4A6B7A"/>
+          </a:solidFill>
+          <a:ln>
+            <a:noFill/>
+          </a:ln>
+          <a:effectLst/>
+        </p:spPr>
+        <p:style>
+          <a:lnRef idx="1">
+            <a:schemeClr val="accent1"/>
+          </a:lnRef>
+          <a:fillRef idx="3">
+            <a:schemeClr val="accent1"/>
+          </a:fillRef>
+          <a:effectRef idx="2">
+            <a:schemeClr val="accent1"/>
+          </a:effectRef>
+          <a:fontRef idx="minor">
+            <a:schemeClr val="lt1"/>
+          </a:fontRef>
+        </p:style>
+        <p:txBody>
+          <a:bodyPr rtlCol="0" anchor="ctr"/>
+          <a:lstStyle/>
+          <a:p>
+            <a:pPr algn="ctr"/>
+          </a:p>
+        </p:txBody>
+      </p:sp>
+      <p:sp>
+        <p:nvSpPr>
+          <p:cNvPr id="19" name="TextBox 18"/>
+          <p:cNvSpPr txBox="1"/>
+          <p:nvPr/>
+        </p:nvSpPr>
+        <p:spPr>
+          <a:xfrm>
+            <a:off x="6400800" y="1600200"/>
+            <a:ext cx="5486400" cy="365760"/>
+          </a:xfrm>
+          <a:prstGeom prst="rect">
+            <a:avLst/>
+          </a:prstGeom>
+          <a:noFill/>
+        </p:spPr>
+        <p:txBody>
+          <a:bodyPr wrap="square" anchor="t">
+            <a:spAutoFit/>
+          </a:bodyPr>
+          <a:lstStyle/>
+          <a:p>
+            <a:pPr algn="l"/>
+            <a:r>
+              <a:rPr sz="1300" b="1">
+                <a:solidFill>
+                  <a:srgbClr val="0A4F6B"/>
+                </a:solidFill>
+                <a:latin typeface="Calibri"/>
+              </a:rPr>
+              <a:t>TMMi — madurez (Nivel 2)</a:t>
+            </a:r>
+          </a:p>
+        </p:txBody>
+      </p:sp>
+      <p:sp>
+        <p:nvSpPr>
+          <p:cNvPr id="20" name="TextBox 19"/>
+          <p:cNvSpPr txBox="1"/>
+          <p:nvPr/>
+        </p:nvSpPr>
+        <p:spPr>
+          <a:xfrm>
+            <a:off x="6446520" y="2011680"/>
+            <a:ext cx="5486400" cy="1645920"/>
           </a:xfrm>
           <a:prstGeom prst="rect">
             <a:avLst/>
@@ -8472,13 +9002,13 @@
               </a:spcAft>
             </a:pPr>
             <a:r>
-              <a:rPr sz="1500">
+              <a:rPr sz="1050">
                 <a:solidFill>
                   <a:srgbClr val="0F2A36"/>
                 </a:solidFill>
                 <a:latin typeface="Calibri"/>
               </a:rPr>
-              <a:t>•  Cancelar y reprogramar citas en produccion</a:t>
+              <a:t>•  Metricas registradas por sprint</a:t>
             </a:r>
           </a:p>
           <a:p>
@@ -8488,13 +9018,13 @@
               </a:spcAft>
             </a:pPr>
             <a:r>
-              <a:rPr sz="1500">
+              <a:rPr sz="1050">
                 <a:solidFill>
                   <a:srgbClr val="0F2A36"/>
                 </a:solidFill>
                 <a:latin typeface="Calibri"/>
               </a:rPr>
-              <a:t>•  6 bugs resueltos (calendario, cedula, validaciones, seguridad)</a:t>
+              <a:t>•  Code review obligatorio antes de merge</a:t>
             </a:r>
           </a:p>
           <a:p>
@@ -8504,13 +9034,13 @@
               </a:spcAft>
             </a:pPr>
             <a:r>
-              <a:rPr sz="1500">
+              <a:rPr sz="1050">
                 <a:solidFill>
                   <a:srgbClr val="0F2A36"/>
                 </a:solidFill>
                 <a:latin typeface="Calibri"/>
               </a:rPr>
-              <a:t>•  Auditoria de cambios con citas_historial</a:t>
+              <a:t>•  Threshold cobertura &gt;=60% en CI</a:t>
             </a:r>
           </a:p>
           <a:p>
@@ -8520,15 +9050,73 @@
               </a:spcAft>
             </a:pPr>
             <a:r>
-              <a:rPr sz="1500">
+              <a:rPr sz="1050">
                 <a:solidFill>
                   <a:srgbClr val="0F2A36"/>
                 </a:solidFill>
                 <a:latin typeface="Calibri"/>
               </a:rPr>
-              <a:t>•  Hueco de seguridad RLS cerrado (B-26)</a:t>
-            </a:r>
-          </a:p>
+              <a:t>•  Cada bug genera test de regresion</a:t>
+            </a:r>
+          </a:p>
+        </p:txBody>
+      </p:sp>
+      <p:sp>
+        <p:nvSpPr>
+          <p:cNvPr id="21" name="TextBox 20"/>
+          <p:cNvSpPr txBox="1"/>
+          <p:nvPr/>
+        </p:nvSpPr>
+        <p:spPr>
+          <a:xfrm>
+            <a:off x="6400800" y="4114800"/>
+            <a:ext cx="5486400" cy="365760"/>
+          </a:xfrm>
+          <a:prstGeom prst="rect">
+            <a:avLst/>
+          </a:prstGeom>
+          <a:noFill/>
+        </p:spPr>
+        <p:txBody>
+          <a:bodyPr wrap="square" anchor="t">
+            <a:spAutoFit/>
+          </a:bodyPr>
+          <a:lstStyle/>
+          <a:p>
+            <a:pPr algn="l"/>
+            <a:r>
+              <a:rPr sz="1300" b="1">
+                <a:solidFill>
+                  <a:srgbClr val="3DDC97"/>
+                </a:solidFill>
+                <a:latin typeface="Calibri"/>
+              </a:rPr>
+              <a:t>TQM — mejora continua</a:t>
+            </a:r>
+          </a:p>
+        </p:txBody>
+      </p:sp>
+      <p:sp>
+        <p:nvSpPr>
+          <p:cNvPr id="22" name="TextBox 21"/>
+          <p:cNvSpPr txBox="1"/>
+          <p:nvPr/>
+        </p:nvSpPr>
+        <p:spPr>
+          <a:xfrm>
+            <a:off x="6446520" y="4526280"/>
+            <a:ext cx="5486400" cy="1645920"/>
+          </a:xfrm>
+          <a:prstGeom prst="rect">
+            <a:avLst/>
+          </a:prstGeom>
+          <a:noFill/>
+        </p:spPr>
+        <p:txBody>
+          <a:bodyPr wrap="square">
+            <a:spAutoFit/>
+          </a:bodyPr>
+          <a:lstStyle/>
           <a:p>
             <a:pPr>
               <a:spcAft>
@@ -8536,33 +9124,169 @@
               </a:spcAft>
             </a:pPr>
             <a:r>
-              <a:rPr sz="1500">
+              <a:rPr sz="1050">
                 <a:solidFill>
                   <a:srgbClr val="0F2A36"/>
                 </a:solidFill>
                 <a:latin typeface="Calibri"/>
               </a:rPr>
-              <a:t>•  117 tests · build limpio · cero regresiones</a:t>
-            </a:r>
-          </a:p>
-        </p:txBody>
-      </p:sp>
-      <p:sp>
-        <p:nvSpPr>
-          <p:cNvPr id="6" name="Rectangle 5"/>
+              <a:t>•  PO prueba el deploy real antes de entregar</a:t>
+            </a:r>
+          </a:p>
+          <a:p>
+            <a:pPr>
+              <a:spcAft>
+                <a:spcPts val="500"/>
+              </a:spcAft>
+            </a:pPr>
+            <a:r>
+              <a:rPr sz="1050">
+                <a:solidFill>
+                  <a:srgbClr val="0F2A36"/>
+                </a:solidFill>
+                <a:latin typeface="Calibri"/>
+              </a:rPr>
+              <a:t>•  Bugs de uso real se arreglan en la jornada</a:t>
+            </a:r>
+          </a:p>
+          <a:p>
+            <a:pPr>
+              <a:spcAft>
+                <a:spcPts val="500"/>
+              </a:spcAft>
+            </a:pPr>
+            <a:r>
+              <a:rPr sz="1050">
+                <a:solidFill>
+                  <a:srgbClr val="0F2A36"/>
+                </a:solidFill>
+                <a:latin typeface="Calibri"/>
+              </a:rPr>
+              <a:t>•  Plan Mode antes de codificar; doc viva</a:t>
+            </a:r>
+          </a:p>
+          <a:p>
+            <a:pPr>
+              <a:spcAft>
+                <a:spcPts val="500"/>
+              </a:spcAft>
+            </a:pPr>
+            <a:r>
+              <a:rPr sz="1050">
+                <a:solidFill>
+                  <a:srgbClr val="0F2A36"/>
+                </a:solidFill>
+                <a:latin typeface="Calibri"/>
+              </a:rPr>
+              <a:t>•  Bug critico cazado por review (antes de prod)</a:t>
+            </a:r>
+          </a:p>
+        </p:txBody>
+      </p:sp>
+      <p:sp>
+        <p:nvSpPr>
+          <p:cNvPr id="23" name="TextBox 22"/>
+          <p:cNvSpPr txBox="1"/>
+          <p:nvPr/>
+        </p:nvSpPr>
+        <p:spPr>
+          <a:xfrm>
+            <a:off x="365760" y="6446520"/>
+            <a:ext cx="8229600" cy="274320"/>
+          </a:xfrm>
+          <a:prstGeom prst="rect">
+            <a:avLst/>
+          </a:prstGeom>
+          <a:noFill/>
+        </p:spPr>
+        <p:txBody>
+          <a:bodyPr wrap="square" anchor="t">
+            <a:spAutoFit/>
+          </a:bodyPr>
+          <a:lstStyle/>
+          <a:p>
+            <a:pPr algn="l"/>
+            <a:r>
+              <a:rPr sz="900" b="0">
+                <a:solidFill>
+                  <a:srgbClr val="4A6B7A"/>
+                </a:solidFill>
+                <a:latin typeface="Calibri"/>
+              </a:rPr>
+              <a:t>Jose (PO) — ISTQB + TMMi + TQM</a:t>
+            </a:r>
+          </a:p>
+        </p:txBody>
+      </p:sp>
+      <p:sp>
+        <p:nvSpPr>
+          <p:cNvPr id="24" name="TextBox 23"/>
+          <p:cNvSpPr txBox="1"/>
+          <p:nvPr/>
+        </p:nvSpPr>
+        <p:spPr>
+          <a:xfrm>
+            <a:off x="10972800" y="6446520"/>
+            <a:ext cx="914400" cy="274320"/>
+          </a:xfrm>
+          <a:prstGeom prst="rect">
+            <a:avLst/>
+          </a:prstGeom>
+          <a:noFill/>
+        </p:spPr>
+        <p:txBody>
+          <a:bodyPr wrap="square" anchor="t">
+            <a:spAutoFit/>
+          </a:bodyPr>
+          <a:lstStyle/>
+          <a:p>
+            <a:pPr algn="r"/>
+            <a:r>
+              <a:rPr sz="900" b="0">
+                <a:solidFill>
+                  <a:srgbClr val="4A6B7A"/>
+                </a:solidFill>
+                <a:latin typeface="Calibri"/>
+              </a:rPr>
+              <a:t>8 / 10</a:t>
+            </a:r>
+          </a:p>
+        </p:txBody>
+      </p:sp>
+    </p:spTree>
+  </p:cSld>
+  <p:clrMapOvr>
+    <a:masterClrMapping/>
+  </p:clrMapOvr>
+</p:sld>
+</file>
+
+<file path=ppt/slides/slide9.xml><?xml version="1.0" encoding="utf-8"?>
+<p:sld xmlns:a="http://schemas.openxmlformats.org/drawingml/2006/main" xmlns:p="http://schemas.openxmlformats.org/presentationml/2006/main" xmlns:r="http://schemas.openxmlformats.org/officeDocument/2006/relationships">
+  <p:cSld>
+    <p:spTree>
+      <p:nvGrpSpPr>
+        <p:cNvPr id="1" name=""/>
+        <p:cNvGrpSpPr/>
+        <p:nvPr/>
+      </p:nvGrpSpPr>
+      <p:grpSpPr/>
+      <p:sp>
+        <p:nvSpPr>
+          <p:cNvPr id="2" name="Rectangle 1"/>
           <p:cNvSpPr/>
           <p:nvPr/>
         </p:nvSpPr>
         <p:spPr>
           <a:xfrm>
-            <a:off x="457200" y="4937760"/>
-            <a:ext cx="11247120" cy="1097280"/>
+            <a:off x="0" y="0"/>
+            <a:ext cx="12191695" cy="6858000"/>
           </a:xfrm>
           <a:prstGeom prst="rect">
             <a:avLst/>
           </a:prstGeom>
           <a:solidFill>
-            <a:srgbClr val="0A4F6B"/>
+            <a:srgbClr val="FFFFFF"/>
           </a:solidFill>
           <a:ln>
             <a:noFill/>
@@ -8593,14 +9317,171 @@
       </p:sp>
       <p:sp>
         <p:nvSpPr>
+          <p:cNvPr id="3" name="Rounded Rectangle 2"/>
+          <p:cNvSpPr/>
+          <p:nvPr/>
+        </p:nvSpPr>
+        <p:spPr>
+          <a:xfrm>
+            <a:off x="457200" y="365760"/>
+            <a:ext cx="1463040" cy="320040"/>
+          </a:xfrm>
+          <a:prstGeom prst="roundRect">
+            <a:avLst/>
+          </a:prstGeom>
+          <a:solidFill>
+            <a:srgbClr val="0A8478"/>
+          </a:solidFill>
+          <a:ln>
+            <a:noFill/>
+          </a:ln>
+          <a:effectLst/>
+        </p:spPr>
+        <p:style>
+          <a:lnRef idx="1">
+            <a:schemeClr val="accent1"/>
+          </a:lnRef>
+          <a:fillRef idx="3">
+            <a:schemeClr val="accent1"/>
+          </a:fillRef>
+          <a:effectRef idx="2">
+            <a:schemeClr val="accent1"/>
+          </a:effectRef>
+          <a:fontRef idx="minor">
+            <a:schemeClr val="lt1"/>
+          </a:fontRef>
+        </p:style>
+        <p:txBody>
+          <a:bodyPr rtlCol="0" anchor="ctr"/>
+          <a:lstStyle/>
+          <a:p>
+            <a:pPr algn="ctr"/>
+            <a:r>
+              <a:rPr sz="1000" b="1">
+                <a:solidFill>
+                  <a:srgbClr val="FFFFFF"/>
+                </a:solidFill>
+              </a:rPr>
+              <a:t>REGISTRO</a:t>
+            </a:r>
+          </a:p>
+        </p:txBody>
+      </p:sp>
+      <p:sp>
+        <p:nvSpPr>
+          <p:cNvPr id="4" name="TextBox 3"/>
+          <p:cNvSpPr txBox="1"/>
+          <p:nvPr/>
+        </p:nvSpPr>
+        <p:spPr>
+          <a:xfrm>
+            <a:off x="457200" y="822960"/>
+            <a:ext cx="11430000" cy="731520"/>
+          </a:xfrm>
+          <a:prstGeom prst="rect">
+            <a:avLst/>
+          </a:prstGeom>
+          <a:noFill/>
+        </p:spPr>
+        <p:txBody>
+          <a:bodyPr wrap="square" anchor="t">
+            <a:spAutoFit/>
+          </a:bodyPr>
+          <a:lstStyle/>
+          <a:p>
+            <a:pPr algn="l"/>
+            <a:r>
+              <a:rPr sz="2700" b="1">
+                <a:solidFill>
+                  <a:srgbClr val="0F2A36"/>
+                </a:solidFill>
+                <a:latin typeface="Calibri"/>
+              </a:rPr>
+              <a:t>Metricas + Herramientas + Kanban</a:t>
+            </a:r>
+          </a:p>
+        </p:txBody>
+      </p:sp>
+      <p:sp>
+        <p:nvSpPr>
+          <p:cNvPr id="5" name="TextBox 4"/>
+          <p:cNvSpPr txBox="1"/>
+          <p:nvPr/>
+        </p:nvSpPr>
+        <p:spPr>
+          <a:xfrm>
+            <a:off x="457200" y="1600200"/>
+            <a:ext cx="5486400" cy="365760"/>
+          </a:xfrm>
+          <a:prstGeom prst="rect">
+            <a:avLst/>
+          </a:prstGeom>
+          <a:noFill/>
+        </p:spPr>
+        <p:txBody>
+          <a:bodyPr wrap="square" anchor="t">
+            <a:spAutoFit/>
+          </a:bodyPr>
+          <a:lstStyle/>
+          <a:p>
+            <a:pPr algn="l"/>
+            <a:r>
+              <a:rPr sz="1300" b="1">
+                <a:solidFill>
+                  <a:srgbClr val="0A4F6B"/>
+                </a:solidFill>
+                <a:latin typeface="Calibri"/>
+              </a:rPr>
+              <a:t>Registro de metricas</a:t>
+            </a:r>
+          </a:p>
+        </p:txBody>
+      </p:sp>
+      <p:sp>
+        <p:nvSpPr>
+          <p:cNvPr id="6" name="TextBox 5"/>
+          <p:cNvSpPr txBox="1"/>
+          <p:nvPr/>
+        </p:nvSpPr>
+        <p:spPr>
+          <a:xfrm>
+            <a:off x="502920" y="2057400"/>
+            <a:ext cx="1737360" cy="502920"/>
+          </a:xfrm>
+          <a:prstGeom prst="rect">
+            <a:avLst/>
+          </a:prstGeom>
+          <a:noFill/>
+        </p:spPr>
+        <p:txBody>
+          <a:bodyPr wrap="square" anchor="t">
+            <a:spAutoFit/>
+          </a:bodyPr>
+          <a:lstStyle/>
+          <a:p>
+            <a:pPr algn="l"/>
+            <a:r>
+              <a:rPr sz="1050" b="1">
+                <a:solidFill>
+                  <a:srgbClr val="0F2A36"/>
+                </a:solidFill>
+                <a:latin typeface="Calibri"/>
+              </a:rPr>
+              <a:t>Requerimientos</a:t>
+            </a:r>
+          </a:p>
+        </p:txBody>
+      </p:sp>
+      <p:sp>
+        <p:nvSpPr>
           <p:cNvPr id="7" name="TextBox 6"/>
           <p:cNvSpPr txBox="1"/>
           <p:nvPr/>
         </p:nvSpPr>
         <p:spPr>
           <a:xfrm>
-            <a:off x="457200" y="5074920"/>
-            <a:ext cx="11247120" cy="457200"/>
+            <a:off x="2286000" y="2057400"/>
+            <a:ext cx="3657600" cy="502920"/>
           </a:xfrm>
           <a:prstGeom prst="rect">
             <a:avLst/>
@@ -8613,29 +9494,493 @@
           </a:bodyPr>
           <a:lstStyle/>
           <a:p>
+            <a:pPr algn="l"/>
+            <a:r>
+              <a:rPr sz="1000" b="0">
+                <a:solidFill>
+                  <a:srgbClr val="4A6B7A"/>
+                </a:solidFill>
+                <a:latin typeface="Calibri"/>
+              </a:rPr>
+              <a:t>HELL-3: cancelar + reprogramar 100%</a:t>
+            </a:r>
+          </a:p>
+        </p:txBody>
+      </p:sp>
+      <p:sp>
+        <p:nvSpPr>
+          <p:cNvPr id="8" name="TextBox 7"/>
+          <p:cNvSpPr txBox="1"/>
+          <p:nvPr/>
+        </p:nvSpPr>
+        <p:spPr>
+          <a:xfrm>
+            <a:off x="502920" y="2624328"/>
+            <a:ext cx="1737360" cy="502920"/>
+          </a:xfrm>
+          <a:prstGeom prst="rect">
+            <a:avLst/>
+          </a:prstGeom>
+          <a:noFill/>
+        </p:spPr>
+        <p:txBody>
+          <a:bodyPr wrap="square" anchor="t">
+            <a:spAutoFit/>
+          </a:bodyPr>
+          <a:lstStyle/>
+          <a:p>
+            <a:pPr algn="l"/>
+            <a:r>
+              <a:rPr sz="1050" b="1">
+                <a:solidFill>
+                  <a:srgbClr val="0F2A36"/>
+                </a:solidFill>
+                <a:latin typeface="Calibri"/>
+              </a:rPr>
+              <a:t>Diseno</a:t>
+            </a:r>
+          </a:p>
+        </p:txBody>
+      </p:sp>
+      <p:sp>
+        <p:nvSpPr>
+          <p:cNvPr id="9" name="TextBox 8"/>
+          <p:cNvSpPr txBox="1"/>
+          <p:nvPr/>
+        </p:nvSpPr>
+        <p:spPr>
+          <a:xfrm>
+            <a:off x="2286000" y="2624328"/>
+            <a:ext cx="3657600" cy="502920"/>
+          </a:xfrm>
+          <a:prstGeom prst="rect">
+            <a:avLst/>
+          </a:prstGeom>
+          <a:noFill/>
+        </p:spPr>
+        <p:txBody>
+          <a:bodyPr wrap="square" anchor="t">
+            <a:spAutoFit/>
+          </a:bodyPr>
+          <a:lstStyle/>
+          <a:p>
+            <a:pPr algn="l"/>
+            <a:r>
+              <a:rPr sz="1000" b="0">
+                <a:solidFill>
+                  <a:srgbClr val="4A6B7A"/>
+                </a:solidFill>
+                <a:latin typeface="Calibri"/>
+              </a:rPr>
+              <a:t>2 RPC SQL + 1 tabla + 4 hooks/comp.</a:t>
+            </a:r>
+          </a:p>
+        </p:txBody>
+      </p:sp>
+      <p:sp>
+        <p:nvSpPr>
+          <p:cNvPr id="10" name="TextBox 9"/>
+          <p:cNvSpPr txBox="1"/>
+          <p:nvPr/>
+        </p:nvSpPr>
+        <p:spPr>
+          <a:xfrm>
+            <a:off x="502920" y="3191256"/>
+            <a:ext cx="1737360" cy="502920"/>
+          </a:xfrm>
+          <a:prstGeom prst="rect">
+            <a:avLst/>
+          </a:prstGeom>
+          <a:noFill/>
+        </p:spPr>
+        <p:txBody>
+          <a:bodyPr wrap="square" anchor="t">
+            <a:spAutoFit/>
+          </a:bodyPr>
+          <a:lstStyle/>
+          <a:p>
+            <a:pPr algn="l"/>
+            <a:r>
+              <a:rPr sz="1050" b="1">
+                <a:solidFill>
+                  <a:srgbClr val="0F2A36"/>
+                </a:solidFill>
+                <a:latin typeface="Calibri"/>
+              </a:rPr>
+              <a:t>Codigo</a:t>
+            </a:r>
+          </a:p>
+        </p:txBody>
+      </p:sp>
+      <p:sp>
+        <p:nvSpPr>
+          <p:cNvPr id="11" name="TextBox 10"/>
+          <p:cNvSpPr txBox="1"/>
+          <p:nvPr/>
+        </p:nvSpPr>
+        <p:spPr>
+          <a:xfrm>
+            <a:off x="2286000" y="3191256"/>
+            <a:ext cx="3657600" cy="502920"/>
+          </a:xfrm>
+          <a:prstGeom prst="rect">
+            <a:avLst/>
+          </a:prstGeom>
+          <a:noFill/>
+        </p:spPr>
+        <p:txBody>
+          <a:bodyPr wrap="square" anchor="t">
+            <a:spAutoFit/>
+          </a:bodyPr>
+          <a:lstStyle/>
+          <a:p>
+            <a:pPr algn="l"/>
+            <a:r>
+              <a:rPr sz="1000" b="0">
+                <a:solidFill>
+                  <a:srgbClr val="4A6B7A"/>
+                </a:solidFill>
+                <a:latin typeface="Calibri"/>
+              </a:rPr>
+              <a:t>~2.6 KLOC · 11 archivos · commits firmados</a:t>
+            </a:r>
+          </a:p>
+        </p:txBody>
+      </p:sp>
+      <p:sp>
+        <p:nvSpPr>
+          <p:cNvPr id="12" name="TextBox 11"/>
+          <p:cNvSpPr txBox="1"/>
+          <p:nvPr/>
+        </p:nvSpPr>
+        <p:spPr>
+          <a:xfrm>
+            <a:off x="502920" y="3758184"/>
+            <a:ext cx="1737360" cy="502920"/>
+          </a:xfrm>
+          <a:prstGeom prst="rect">
+            <a:avLst/>
+          </a:prstGeom>
+          <a:noFill/>
+        </p:spPr>
+        <p:txBody>
+          <a:bodyPr wrap="square" anchor="t">
+            <a:spAutoFit/>
+          </a:bodyPr>
+          <a:lstStyle/>
+          <a:p>
+            <a:pPr algn="l"/>
+            <a:r>
+              <a:rPr sz="1050" b="1">
+                <a:solidFill>
+                  <a:srgbClr val="0F2A36"/>
+                </a:solidFill>
+                <a:latin typeface="Calibri"/>
+              </a:rPr>
+              <a:t>Defectos</a:t>
+            </a:r>
+          </a:p>
+        </p:txBody>
+      </p:sp>
+      <p:sp>
+        <p:nvSpPr>
+          <p:cNvPr id="13" name="TextBox 12"/>
+          <p:cNvSpPr txBox="1"/>
+          <p:nvPr/>
+        </p:nvSpPr>
+        <p:spPr>
+          <a:xfrm>
+            <a:off x="2286000" y="3758184"/>
+            <a:ext cx="3657600" cy="502920"/>
+          </a:xfrm>
+          <a:prstGeom prst="rect">
+            <a:avLst/>
+          </a:prstGeom>
+          <a:noFill/>
+        </p:spPr>
+        <p:txBody>
+          <a:bodyPr wrap="square" anchor="t">
+            <a:spAutoFit/>
+          </a:bodyPr>
+          <a:lstStyle/>
+          <a:p>
+            <a:pPr algn="l"/>
+            <a:r>
+              <a:rPr sz="1000" b="0">
+                <a:solidFill>
+                  <a:srgbClr val="4A6B7A"/>
+                </a:solidFill>
+                <a:latin typeface="Calibri"/>
+              </a:rPr>
+              <a:t>6 detectados · 6 resueltos · 0 pend.</a:t>
+            </a:r>
+          </a:p>
+        </p:txBody>
+      </p:sp>
+      <p:sp>
+        <p:nvSpPr>
+          <p:cNvPr id="14" name="TextBox 13"/>
+          <p:cNvSpPr txBox="1"/>
+          <p:nvPr/>
+        </p:nvSpPr>
+        <p:spPr>
+          <a:xfrm>
+            <a:off x="502920" y="4325112"/>
+            <a:ext cx="1737360" cy="502920"/>
+          </a:xfrm>
+          <a:prstGeom prst="rect">
+            <a:avLst/>
+          </a:prstGeom>
+          <a:noFill/>
+        </p:spPr>
+        <p:txBody>
+          <a:bodyPr wrap="square" anchor="t">
+            <a:spAutoFit/>
+          </a:bodyPr>
+          <a:lstStyle/>
+          <a:p>
+            <a:pPr algn="l"/>
+            <a:r>
+              <a:rPr sz="1050" b="1">
+                <a:solidFill>
+                  <a:srgbClr val="0F2A36"/>
+                </a:solidFill>
+                <a:latin typeface="Calibri"/>
+              </a:rPr>
+              <a:t>Esfuerzo</a:t>
+            </a:r>
+          </a:p>
+        </p:txBody>
+      </p:sp>
+      <p:sp>
+        <p:nvSpPr>
+          <p:cNvPr id="15" name="TextBox 14"/>
+          <p:cNvSpPr txBox="1"/>
+          <p:nvPr/>
+        </p:nvSpPr>
+        <p:spPr>
+          <a:xfrm>
+            <a:off x="2286000" y="4325112"/>
+            <a:ext cx="3657600" cy="502920"/>
+          </a:xfrm>
+          <a:prstGeom prst="rect">
+            <a:avLst/>
+          </a:prstGeom>
+          <a:noFill/>
+        </p:spPr>
+        <p:txBody>
+          <a:bodyPr wrap="square" anchor="t">
+            <a:spAutoFit/>
+          </a:bodyPr>
+          <a:lstStyle/>
+          <a:p>
+            <a:pPr algn="l"/>
+            <a:r>
+              <a:rPr sz="1000" b="0">
+                <a:solidFill>
+                  <a:srgbClr val="4A6B7A"/>
+                </a:solidFill>
+                <a:latin typeface="Calibri"/>
+              </a:rPr>
+              <a:t>ciclos &lt;30 min/bug · ~2 sem</a:t>
+            </a:r>
+          </a:p>
+        </p:txBody>
+      </p:sp>
+      <p:sp>
+        <p:nvSpPr>
+          <p:cNvPr id="16" name="TextBox 15"/>
+          <p:cNvSpPr txBox="1"/>
+          <p:nvPr/>
+        </p:nvSpPr>
+        <p:spPr>
+          <a:xfrm>
+            <a:off x="502920" y="4892040"/>
+            <a:ext cx="1737360" cy="502920"/>
+          </a:xfrm>
+          <a:prstGeom prst="rect">
+            <a:avLst/>
+          </a:prstGeom>
+          <a:noFill/>
+        </p:spPr>
+        <p:txBody>
+          <a:bodyPr wrap="square" anchor="t">
+            <a:spAutoFit/>
+          </a:bodyPr>
+          <a:lstStyle/>
+          <a:p>
+            <a:pPr algn="l"/>
+            <a:r>
+              <a:rPr sz="1050" b="1">
+                <a:solidFill>
+                  <a:srgbClr val="0F2A36"/>
+                </a:solidFill>
+                <a:latin typeface="Calibri"/>
+              </a:rPr>
+              <a:t>Productividad</a:t>
+            </a:r>
+          </a:p>
+        </p:txBody>
+      </p:sp>
+      <p:sp>
+        <p:nvSpPr>
+          <p:cNvPr id="17" name="TextBox 16"/>
+          <p:cNvSpPr txBox="1"/>
+          <p:nvPr/>
+        </p:nvSpPr>
+        <p:spPr>
+          <a:xfrm>
+            <a:off x="2286000" y="4892040"/>
+            <a:ext cx="3657600" cy="502920"/>
+          </a:xfrm>
+          <a:prstGeom prst="rect">
+            <a:avLst/>
+          </a:prstGeom>
+          <a:noFill/>
+        </p:spPr>
+        <p:txBody>
+          <a:bodyPr wrap="square" anchor="t">
+            <a:spAutoFit/>
+          </a:bodyPr>
+          <a:lstStyle/>
+          <a:p>
+            <a:pPr algn="l"/>
+            <a:r>
+              <a:rPr sz="1000" b="0">
+                <a:solidFill>
+                  <a:srgbClr val="4A6B7A"/>
+                </a:solidFill>
+                <a:latin typeface="Calibri"/>
+              </a:rPr>
+              <a:t>~2 deploys/dia · bundle -34%</a:t>
+            </a:r>
+          </a:p>
+        </p:txBody>
+      </p:sp>
+      <p:sp>
+        <p:nvSpPr>
+          <p:cNvPr id="18" name="TextBox 17"/>
+          <p:cNvSpPr txBox="1"/>
+          <p:nvPr/>
+        </p:nvSpPr>
+        <p:spPr>
+          <a:xfrm>
+            <a:off x="502920" y="5458968"/>
+            <a:ext cx="1737360" cy="502920"/>
+          </a:xfrm>
+          <a:prstGeom prst="rect">
+            <a:avLst/>
+          </a:prstGeom>
+          <a:noFill/>
+        </p:spPr>
+        <p:txBody>
+          <a:bodyPr wrap="square" anchor="t">
+            <a:spAutoFit/>
+          </a:bodyPr>
+          <a:lstStyle/>
+          <a:p>
+            <a:pPr algn="l"/>
+            <a:r>
+              <a:rPr sz="1050" b="1">
+                <a:solidFill>
+                  <a:srgbClr val="0F2A36"/>
+                </a:solidFill>
+                <a:latin typeface="Calibri"/>
+              </a:rPr>
+              <a:t>Calidad</a:t>
+            </a:r>
+          </a:p>
+        </p:txBody>
+      </p:sp>
+      <p:sp>
+        <p:nvSpPr>
+          <p:cNvPr id="19" name="TextBox 18"/>
+          <p:cNvSpPr txBox="1"/>
+          <p:nvPr/>
+        </p:nvSpPr>
+        <p:spPr>
+          <a:xfrm>
+            <a:off x="2286000" y="5458968"/>
+            <a:ext cx="3657600" cy="502920"/>
+          </a:xfrm>
+          <a:prstGeom prst="rect">
+            <a:avLst/>
+          </a:prstGeom>
+          <a:noFill/>
+        </p:spPr>
+        <p:txBody>
+          <a:bodyPr wrap="square" anchor="t">
+            <a:spAutoFit/>
+          </a:bodyPr>
+          <a:lstStyle/>
+          <a:p>
+            <a:pPr algn="l"/>
+            <a:r>
+              <a:rPr sz="1000" b="0">
+                <a:solidFill>
+                  <a:srgbClr val="4A6B7A"/>
+                </a:solidFill>
+                <a:latin typeface="Calibri"/>
+              </a:rPr>
+              <a:t>117 tests · P95 300ms · RLS</a:t>
+            </a:r>
+          </a:p>
+        </p:txBody>
+      </p:sp>
+      <p:sp>
+        <p:nvSpPr>
+          <p:cNvPr id="20" name="Rectangle 19"/>
+          <p:cNvSpPr/>
+          <p:nvPr/>
+        </p:nvSpPr>
+        <p:spPr>
+          <a:xfrm>
+            <a:off x="6035040" y="1554480"/>
+            <a:ext cx="18288" cy="4754880"/>
+          </a:xfrm>
+          <a:prstGeom prst="rect">
+            <a:avLst/>
+          </a:prstGeom>
+          <a:solidFill>
+            <a:srgbClr val="4A6B7A"/>
+          </a:solidFill>
+          <a:ln>
+            <a:noFill/>
+          </a:ln>
+          <a:effectLst/>
+        </p:spPr>
+        <p:style>
+          <a:lnRef idx="1">
+            <a:schemeClr val="accent1"/>
+          </a:lnRef>
+          <a:fillRef idx="3">
+            <a:schemeClr val="accent1"/>
+          </a:fillRef>
+          <a:effectRef idx="2">
+            <a:schemeClr val="accent1"/>
+          </a:effectRef>
+          <a:fontRef idx="minor">
+            <a:schemeClr val="lt1"/>
+          </a:fontRef>
+        </p:style>
+        <p:txBody>
+          <a:bodyPr rtlCol="0" anchor="ctr"/>
+          <a:lstStyle/>
+          <a:p>
             <a:pPr algn="ctr"/>
-            <a:r>
-              <a:rPr sz="1500" b="1">
-                <a:solidFill>
-                  <a:srgbClr val="FFFFFF"/>
-                </a:solidFill>
-                <a:latin typeface="Calibri"/>
-              </a:rPr>
-              <a:t>Sprint 2 entregado. Siguiente: Sincronizacion entre sedes (Sprint 3).</a:t>
-            </a:r>
-          </a:p>
-        </p:txBody>
-      </p:sp>
-      <p:sp>
-        <p:nvSpPr>
-          <p:cNvPr id="8" name="TextBox 7"/>
-          <p:cNvSpPr txBox="1"/>
-          <p:nvPr/>
-        </p:nvSpPr>
-        <p:spPr>
-          <a:xfrm>
-            <a:off x="457200" y="5532120"/>
-            <a:ext cx="11247120" cy="365760"/>
+          </a:p>
+        </p:txBody>
+      </p:sp>
+      <p:sp>
+        <p:nvSpPr>
+          <p:cNvPr id="21" name="TextBox 20"/>
+          <p:cNvSpPr txBox="1"/>
+          <p:nvPr/>
+        </p:nvSpPr>
+        <p:spPr>
+          <a:xfrm>
+            <a:off x="6400800" y="1600200"/>
+            <a:ext cx="5486400" cy="365760"/>
           </a:xfrm>
           <a:prstGeom prst="rect">
             <a:avLst/>
@@ -8648,22 +9993,231 @@
           </a:bodyPr>
           <a:lstStyle/>
           <a:p>
-            <a:pPr algn="ctr"/>
-            <a:r>
-              <a:rPr sz="1400" b="0">
-                <a:solidFill>
-                  <a:srgbClr val="3DDC97"/>
-                </a:solidFill>
-                <a:latin typeface="Calibri"/>
-              </a:rPr>
-              <a:t>Gracias. Preguntas?</a:t>
-            </a:r>
-          </a:p>
-        </p:txBody>
-      </p:sp>
-      <p:sp>
-        <p:nvSpPr>
-          <p:cNvPr id="9" name="TextBox 8"/>
+            <a:pPr algn="l"/>
+            <a:r>
+              <a:rPr sz="1300" b="1">
+                <a:solidFill>
+                  <a:srgbClr val="0A4F6B"/>
+                </a:solidFill>
+                <a:latin typeface="Calibri"/>
+              </a:rPr>
+              <a:t>Herramientas</a:t>
+            </a:r>
+          </a:p>
+        </p:txBody>
+      </p:sp>
+      <p:sp>
+        <p:nvSpPr>
+          <p:cNvPr id="22" name="TextBox 21"/>
+          <p:cNvSpPr txBox="1"/>
+          <p:nvPr/>
+        </p:nvSpPr>
+        <p:spPr>
+          <a:xfrm>
+            <a:off x="6446520" y="2011680"/>
+            <a:ext cx="5486400" cy="1828800"/>
+          </a:xfrm>
+          <a:prstGeom prst="rect">
+            <a:avLst/>
+          </a:prstGeom>
+          <a:noFill/>
+        </p:spPr>
+        <p:txBody>
+          <a:bodyPr wrap="square">
+            <a:spAutoFit/>
+          </a:bodyPr>
+          <a:lstStyle/>
+          <a:p>
+            <a:pPr>
+              <a:spcAft>
+                <a:spcPts val="500"/>
+              </a:spcAft>
+            </a:pPr>
+            <a:r>
+              <a:rPr sz="1050">
+                <a:solidFill>
+                  <a:srgbClr val="0F2A36"/>
+                </a:solidFill>
+                <a:latin typeface="Calibri"/>
+              </a:rPr>
+              <a:t>•  GitHub (commits firmados, code review)</a:t>
+            </a:r>
+          </a:p>
+          <a:p>
+            <a:pPr>
+              <a:spcAft>
+                <a:spcPts val="500"/>
+              </a:spcAft>
+            </a:pPr>
+            <a:r>
+              <a:rPr sz="1050">
+                <a:solidFill>
+                  <a:srgbClr val="0F2A36"/>
+                </a:solidFill>
+                <a:latin typeface="Calibri"/>
+              </a:rPr>
+              <a:t>•  Jira (Kanban HELL-3 + 13 subtareas)</a:t>
+            </a:r>
+          </a:p>
+          <a:p>
+            <a:pPr>
+              <a:spcAft>
+                <a:spcPts val="500"/>
+              </a:spcAft>
+            </a:pPr>
+            <a:r>
+              <a:rPr sz="1050">
+                <a:solidFill>
+                  <a:srgbClr val="0F2A36"/>
+                </a:solidFill>
+                <a:latin typeface="Calibri"/>
+              </a:rPr>
+              <a:t>•  Vitest + RTL (117 tests) · Locust (carga)</a:t>
+            </a:r>
+          </a:p>
+          <a:p>
+            <a:pPr>
+              <a:spcAft>
+                <a:spcPts val="500"/>
+              </a:spcAft>
+            </a:pPr>
+            <a:r>
+              <a:rPr sz="1050">
+                <a:solidFill>
+                  <a:srgbClr val="0F2A36"/>
+                </a:solidFill>
+                <a:latin typeface="Calibri"/>
+              </a:rPr>
+              <a:t>•  Supabase (BD+Auth+RLS) · Railway (deploy)</a:t>
+            </a:r>
+          </a:p>
+          <a:p>
+            <a:pPr>
+              <a:spcAft>
+                <a:spcPts val="500"/>
+              </a:spcAft>
+            </a:pPr>
+            <a:r>
+              <a:rPr sz="1050">
+                <a:solidFill>
+                  <a:srgbClr val="0F2A36"/>
+                </a:solidFill>
+                <a:latin typeface="Calibri"/>
+              </a:rPr>
+              <a:t>•  SonarCloud configurado (analisis estatico)</a:t>
+            </a:r>
+          </a:p>
+        </p:txBody>
+      </p:sp>
+      <p:sp>
+        <p:nvSpPr>
+          <p:cNvPr id="23" name="TextBox 22"/>
+          <p:cNvSpPr txBox="1"/>
+          <p:nvPr/>
+        </p:nvSpPr>
+        <p:spPr>
+          <a:xfrm>
+            <a:off x="6400800" y="4114800"/>
+            <a:ext cx="5486400" cy="365760"/>
+          </a:xfrm>
+          <a:prstGeom prst="rect">
+            <a:avLst/>
+          </a:prstGeom>
+          <a:noFill/>
+        </p:spPr>
+        <p:txBody>
+          <a:bodyPr wrap="square" anchor="t">
+            <a:spAutoFit/>
+          </a:bodyPr>
+          <a:lstStyle/>
+          <a:p>
+            <a:pPr algn="l"/>
+            <a:r>
+              <a:rPr sz="1300" b="1">
+                <a:solidFill>
+                  <a:srgbClr val="0A4F6B"/>
+                </a:solidFill>
+                <a:latin typeface="Calibri"/>
+              </a:rPr>
+              <a:t>Kanban HELL-3</a:t>
+            </a:r>
+          </a:p>
+        </p:txBody>
+      </p:sp>
+      <p:sp>
+        <p:nvSpPr>
+          <p:cNvPr id="24" name="TextBox 23"/>
+          <p:cNvSpPr txBox="1"/>
+          <p:nvPr/>
+        </p:nvSpPr>
+        <p:spPr>
+          <a:xfrm>
+            <a:off x="6446520" y="4526280"/>
+            <a:ext cx="5486400" cy="1645920"/>
+          </a:xfrm>
+          <a:prstGeom prst="rect">
+            <a:avLst/>
+          </a:prstGeom>
+          <a:noFill/>
+        </p:spPr>
+        <p:txBody>
+          <a:bodyPr wrap="square">
+            <a:spAutoFit/>
+          </a:bodyPr>
+          <a:lstStyle/>
+          <a:p>
+            <a:pPr>
+              <a:spcAft>
+                <a:spcPts val="500"/>
+              </a:spcAft>
+            </a:pPr>
+            <a:r>
+              <a:rPr sz="1050">
+                <a:solidFill>
+                  <a:srgbClr val="0F2A36"/>
+                </a:solidFill>
+                <a:latin typeface="Calibri"/>
+              </a:rPr>
+              <a:t>•  Done: 6 bugs + cancelar + reprogramar + historial</a:t>
+            </a:r>
+          </a:p>
+          <a:p>
+            <a:pPr>
+              <a:spcAft>
+                <a:spcPts val="500"/>
+              </a:spcAft>
+            </a:pPr>
+            <a:r>
+              <a:rPr sz="1050">
+                <a:solidFill>
+                  <a:srgbClr val="0F2A36"/>
+                </a:solidFill>
+                <a:latin typeface="Calibri"/>
+              </a:rPr>
+              <a:t>•  In Progress: (sprint cerrado)</a:t>
+            </a:r>
+          </a:p>
+          <a:p>
+            <a:pPr>
+              <a:spcAft>
+                <a:spcPts val="500"/>
+              </a:spcAft>
+            </a:pPr>
+            <a:r>
+              <a:rPr sz="1050">
+                <a:solidFill>
+                  <a:srgbClr val="0F2A36"/>
+                </a:solidFill>
+                <a:latin typeface="Calibri"/>
+              </a:rPr>
+              <a:t>•  To Do (Sprint 5): OWASP ZAP + Lighthouse</a:t>
+            </a:r>
+          </a:p>
+        </p:txBody>
+      </p:sp>
+      <p:sp>
+        <p:nvSpPr>
+          <p:cNvPr id="25" name="TextBox 24"/>
           <p:cNvSpPr txBox="1"/>
           <p:nvPr/>
         </p:nvSpPr>
@@ -8691,14 +10245,14 @@
                 </a:solidFill>
                 <a:latin typeface="Calibri"/>
               </a:rPr>
-              <a:t>Jose (PO) — 25s</a:t>
-            </a:r>
-          </a:p>
-        </p:txBody>
-      </p:sp>
-      <p:sp>
-        <p:nvSpPr>
-          <p:cNvPr id="10" name="TextBox 9"/>
+              <a:t>Jose (PO) — registro + herramientas + Kanban</a:t>
+            </a:r>
+          </a:p>
+        </p:txBody>
+      </p:sp>
+      <p:sp>
+        <p:nvSpPr>
+          <p:cNvPr id="26" name="TextBox 25"/>
           <p:cNvSpPr txBox="1"/>
           <p:nvPr/>
         </p:nvSpPr>
@@ -8726,7 +10280,7 @@
                 </a:solidFill>
                 <a:latin typeface="Calibri"/>
               </a:rPr>
-              <a:t>8 / 8</a:t>
+              <a:t>9 / 10</a:t>
             </a:r>
           </a:p>
         </p:txBody>
